--- a/revised presentation.pptx
+++ b/revised presentation.pptx
@@ -143,7 +143,7 @@
 <file path=ppt/revisionInfo.xml><?xml version="1.0" encoding="utf-8"?>
 <p1510:revInfo xmlns:a="http://schemas.openxmlformats.org/drawingml/2006/main" xmlns:r="http://schemas.openxmlformats.org/officeDocument/2006/relationships" xmlns:p1510="http://schemas.microsoft.com/office/powerpoint/2015/10/main">
   <p1510:revLst>
-    <p1510:client id="{D40C443C-349D-947D-0D92-845940A0ADC0}" v="956" dt="2026-05-10T08:30:40.509"/>
+    <p1510:client id="{D40C443C-349D-947D-0D92-845940A0ADC0}" v="979" dt="2026-05-10T08:54:24.117"/>
   </p1510:revLst>
 </p1510:revInfo>
 </file>
@@ -153,7 +153,7 @@
   <pc:docChgLst>
     <pc:chgData name="Shayne Yong" userId="S::sy284@kent.ac.uk::e3322dfb-8616-49c3-a67b-502df9ca7e2b" providerId="AD" clId="Web-{D40C443C-349D-947D-0D92-845940A0ADC0}"/>
     <pc:docChg chg="addSld modSld sldOrd modMainMaster">
-      <pc:chgData name="Shayne Yong" userId="S::sy284@kent.ac.uk::e3322dfb-8616-49c3-a67b-502df9ca7e2b" providerId="AD" clId="Web-{D40C443C-349D-947D-0D92-845940A0ADC0}" dt="2026-05-10T08:30:40.493" v="953"/>
+      <pc:chgData name="Shayne Yong" userId="S::sy284@kent.ac.uk::e3322dfb-8616-49c3-a67b-502df9ca7e2b" providerId="AD" clId="Web-{D40C443C-349D-947D-0D92-845940A0ADC0}" dt="2026-05-10T08:54:24.117" v="974" actId="20577"/>
       <pc:docMkLst>
         <pc:docMk/>
       </pc:docMkLst>
@@ -212,7 +212,7 @@
         </pc:spChg>
       </pc:sldChg>
       <pc:sldChg chg="modSp new modTransition">
-        <pc:chgData name="Shayne Yong" userId="S::sy284@kent.ac.uk::e3322dfb-8616-49c3-a67b-502df9ca7e2b" providerId="AD" clId="Web-{D40C443C-349D-947D-0D92-845940A0ADC0}" dt="2026-05-10T08:30:40.493" v="953"/>
+        <pc:chgData name="Shayne Yong" userId="S::sy284@kent.ac.uk::e3322dfb-8616-49c3-a67b-502df9ca7e2b" providerId="AD" clId="Web-{D40C443C-349D-947D-0D92-845940A0ADC0}" dt="2026-05-10T08:54:24.117" v="974" actId="20577"/>
         <pc:sldMkLst>
           <pc:docMk/>
           <pc:sldMk cId="2197914076" sldId="262"/>
@@ -226,7 +226,7 @@
           </ac:spMkLst>
         </pc:spChg>
         <pc:spChg chg="mod">
-          <ac:chgData name="Shayne Yong" userId="S::sy284@kent.ac.uk::e3322dfb-8616-49c3-a67b-502df9ca7e2b" providerId="AD" clId="Web-{D40C443C-349D-947D-0D92-845940A0ADC0}" dt="2026-05-10T08:22:20.933" v="925" actId="20577"/>
+          <ac:chgData name="Shayne Yong" userId="S::sy284@kent.ac.uk::e3322dfb-8616-49c3-a67b-502df9ca7e2b" providerId="AD" clId="Web-{D40C443C-349D-947D-0D92-845940A0ADC0}" dt="2026-05-10T08:54:24.117" v="974" actId="20577"/>
           <ac:spMkLst>
             <pc:docMk/>
             <pc:sldMk cId="2197914076" sldId="262"/>
@@ -334,8 +334,8 @@
           </ac:picMkLst>
         </pc:picChg>
       </pc:sldChg>
-      <pc:sldChg chg="addSp modSp new ord modTransition addAnim modAnim">
-        <pc:chgData name="Shayne Yong" userId="S::sy284@kent.ac.uk::e3322dfb-8616-49c3-a67b-502df9ca7e2b" providerId="AD" clId="Web-{D40C443C-349D-947D-0D92-845940A0ADC0}" dt="2026-05-10T08:30:40.493" v="953"/>
+      <pc:sldChg chg="addSp delSp modSp new ord modTransition addAnim delAnim modAnim">
+        <pc:chgData name="Shayne Yong" userId="S::sy284@kent.ac.uk::e3322dfb-8616-49c3-a67b-502df9ca7e2b" providerId="AD" clId="Web-{D40C443C-349D-947D-0D92-845940A0ADC0}" dt="2026-05-10T08:52:42.819" v="963" actId="1076"/>
         <pc:sldMkLst>
           <pc:docMk/>
           <pc:sldMk cId="2072150252" sldId="267"/>
@@ -356,12 +356,20 @@
             <ac:spMk id="3" creationId="{81C18B54-42FA-9FC6-5C51-787DA9C338B7}"/>
           </ac:spMkLst>
         </pc:spChg>
-        <pc:picChg chg="add mod">
-          <ac:chgData name="Shayne Yong" userId="S::sy284@kent.ac.uk::e3322dfb-8616-49c3-a67b-502df9ca7e2b" providerId="AD" clId="Web-{D40C443C-349D-947D-0D92-845940A0ADC0}" dt="2026-05-10T07:46:57.943" v="504" actId="1076"/>
+        <pc:picChg chg="add del mod">
+          <ac:chgData name="Shayne Yong" userId="S::sy284@kent.ac.uk::e3322dfb-8616-49c3-a67b-502df9ca7e2b" providerId="AD" clId="Web-{D40C443C-349D-947D-0D92-845940A0ADC0}" dt="2026-05-10T08:52:17.803" v="954"/>
           <ac:picMkLst>
             <pc:docMk/>
             <pc:sldMk cId="2072150252" sldId="267"/>
             <ac:picMk id="4" creationId="{D87AE8FE-4DE3-B859-C267-E76DD6414A6F}"/>
+          </ac:picMkLst>
+        </pc:picChg>
+        <pc:picChg chg="add mod">
+          <ac:chgData name="Shayne Yong" userId="S::sy284@kent.ac.uk::e3322dfb-8616-49c3-a67b-502df9ca7e2b" providerId="AD" clId="Web-{D40C443C-349D-947D-0D92-845940A0ADC0}" dt="2026-05-10T08:52:42.819" v="963" actId="1076"/>
+          <ac:picMkLst>
+            <pc:docMk/>
+            <pc:sldMk cId="2072150252" sldId="267"/>
+            <ac:picMk id="5" creationId="{1E4A2EC9-100C-3E82-0A23-EE1AAACC022F}"/>
           </ac:picMkLst>
         </pc:picChg>
       </pc:sldChg>
@@ -20931,13 +20939,72 @@
           </a:p>
           <a:p>
             <a:r>
+              <a:rPr lang="en-GB" sz="2000">
+                <a:ea typeface="+mn-lt"/>
+                <a:cs typeface="+mn-lt"/>
+              </a:rPr>
+              <a:t>A web app where the user selects the industry they want to go into, where they can then choose between</a:t>
+            </a:r>
+            <a:endParaRPr lang="en-GB">
+              <a:ea typeface="+mn-lt"/>
+              <a:cs typeface="+mn-lt"/>
+            </a:endParaRPr>
+          </a:p>
+          <a:p>
+            <a:r>
+              <a:rPr lang="en-GB" sz="2000">
+                <a:ea typeface="+mn-lt"/>
+                <a:cs typeface="+mn-lt"/>
+              </a:rPr>
+              <a:t>uploading their own CV or use one of the presets available. The AI will begin to shame the user by</a:t>
+            </a:r>
+            <a:endParaRPr lang="en-GB">
+              <a:ea typeface="+mn-lt"/>
+              <a:cs typeface="+mn-lt"/>
+            </a:endParaRPr>
+          </a:p>
+          <a:p>
+            <a:r>
               <a:rPr lang="en-GB" sz="2000" dirty="0">
                 <a:ea typeface="+mn-lt"/>
                 <a:cs typeface="+mn-lt"/>
               </a:rPr>
-              <a:t>A web abb where the user selects the industry they want to go into, where they can then choose between uploading their own CV or use one of the presets available. The AI will begin to shame the user by roasting the flaws within the CV. Which will be voiced by an AI, to apply the MOST damage to the user’s mental health. Though it’s not all bad, as afterwards the AI will provide constructive feedback CV and grade them out of 100.</a:t>
-            </a:r>
-            <a:endParaRPr lang="en-GB" dirty="0"/>
+              <a:t> </a:t>
+            </a:r>
+            <a:r>
+              <a:rPr lang="en-GB" sz="2000">
+                <a:ea typeface="+mn-lt"/>
+                <a:cs typeface="+mn-lt"/>
+              </a:rPr>
+              <a:t>roasting the flaws within the CV. Which will be voiced by an AI, to apply the MOST damage to the user’s</a:t>
+            </a:r>
+            <a:endParaRPr lang="en-GB">
+              <a:ea typeface="+mn-lt"/>
+              <a:cs typeface="+mn-lt"/>
+            </a:endParaRPr>
+          </a:p>
+          <a:p>
+            <a:r>
+              <a:rPr lang="en-GB" sz="2000" dirty="0">
+                <a:ea typeface="+mn-lt"/>
+                <a:cs typeface="+mn-lt"/>
+              </a:rPr>
+              <a:t> mental health. Though it’s not all bad, as afterwards the AI will provide constructive feedback CV</a:t>
+            </a:r>
+            <a:endParaRPr lang="en-GB" dirty="0">
+              <a:ea typeface="+mn-lt"/>
+              <a:cs typeface="+mn-lt"/>
+            </a:endParaRPr>
+          </a:p>
+          <a:p>
+            <a:r>
+              <a:rPr lang="en-GB" sz="2000" dirty="0">
+                <a:ea typeface="+mn-lt"/>
+                <a:cs typeface="+mn-lt"/>
+              </a:rPr>
+              <a:t> and grade them out of 100.</a:t>
+            </a:r>
+            <a:endParaRPr lang="en-GB"/>
           </a:p>
           <a:p>
             <a:pPr marL="342900" indent="-342900">
@@ -21258,10 +21325,10 @@
       </p:sp>
       <p:pic>
         <p:nvPicPr>
-          <p:cNvPr id="4" name="Picture 3" descr="A qr code with a piece of paper on it&#10;&#10;AI-generated content may be incorrect.">
-            <a:extLst>
-              <a:ext uri="{FF2B5EF4-FFF2-40B4-BE49-F238E27FC236}">
-                <a16:creationId xmlns:a16="http://schemas.microsoft.com/office/drawing/2014/main" id="{D87AE8FE-4DE3-B859-C267-E76DD6414A6F}"/>
+          <p:cNvPr id="5" name="Picture 4" descr="A qr code with a car and a piece of paper&#10;&#10;AI-generated content may be incorrect.">
+            <a:extLst>
+              <a:ext uri="{FF2B5EF4-FFF2-40B4-BE49-F238E27FC236}">
+                <a16:creationId xmlns:a16="http://schemas.microsoft.com/office/drawing/2014/main" id="{1E4A2EC9-100C-3E82-0A23-EE1AAACC022F}"/>
               </a:ext>
             </a:extLst>
           </p:cNvPr>
@@ -21278,8 +21345,8 @@
         </p:blipFill>
         <p:spPr>
           <a:xfrm>
-            <a:off x="2990850" y="323850"/>
-            <a:ext cx="6210300" cy="6210300"/>
+            <a:off x="2976113" y="309113"/>
+            <a:ext cx="6232585" cy="6232585"/>
           </a:xfrm>
           <a:prstGeom prst="rect">
             <a:avLst/>
@@ -21308,127 +21375,6 @@
       </p:transition>
     </mc:Fallback>
   </mc:AlternateContent>
-  <p:timing>
-    <p:tnLst>
-      <p:par>
-        <p:cTn id="1" dur="indefinite" restart="never" nodeType="tmRoot">
-          <p:childTnLst>
-            <p:seq concurrent="1" nextAc="seek">
-              <p:cTn id="2" dur="indefinite" nodeType="mainSeq">
-                <p:childTnLst>
-                  <p:par>
-                    <p:cTn id="3" fill="hold">
-                      <p:stCondLst>
-                        <p:cond delay="indefinite"/>
-                      </p:stCondLst>
-                      <p:childTnLst>
-                        <p:par>
-                          <p:cTn id="4" fill="hold">
-                            <p:stCondLst>
-                              <p:cond delay="0"/>
-                            </p:stCondLst>
-                            <p:childTnLst>
-                              <p:par>
-                                <p:cTn id="5" presetID="2" presetClass="entr" presetSubtype="4" fill="hold" nodeType="clickEffect">
-                                  <p:stCondLst>
-                                    <p:cond delay="0"/>
-                                  </p:stCondLst>
-                                  <p:childTnLst>
-                                    <p:set>
-                                      <p:cBhvr>
-                                        <p:cTn id="6" dur="1" fill="hold">
-                                          <p:stCondLst>
-                                            <p:cond delay="0"/>
-                                          </p:stCondLst>
-                                        </p:cTn>
-                                        <p:tgtEl>
-                                          <p:spTgt spid="4"/>
-                                        </p:tgtEl>
-                                        <p:attrNameLst>
-                                          <p:attrName>style.visibility</p:attrName>
-                                        </p:attrNameLst>
-                                      </p:cBhvr>
-                                      <p:to>
-                                        <p:strVal val="visible"/>
-                                      </p:to>
-                                    </p:set>
-                                    <p:anim calcmode="lin" valueType="num">
-                                      <p:cBhvr additive="base">
-                                        <p:cTn id="7" dur="500" fill="hold"/>
-                                        <p:tgtEl>
-                                          <p:spTgt spid="4"/>
-                                        </p:tgtEl>
-                                        <p:attrNameLst>
-                                          <p:attrName>ppt_x</p:attrName>
-                                        </p:attrNameLst>
-                                      </p:cBhvr>
-                                      <p:tavLst>
-                                        <p:tav tm="0">
-                                          <p:val>
-                                            <p:strVal val="#ppt_x"/>
-                                          </p:val>
-                                        </p:tav>
-                                        <p:tav tm="100000">
-                                          <p:val>
-                                            <p:strVal val="#ppt_x"/>
-                                          </p:val>
-                                        </p:tav>
-                                      </p:tavLst>
-                                    </p:anim>
-                                    <p:anim calcmode="lin" valueType="num">
-                                      <p:cBhvr additive="base">
-                                        <p:cTn id="8" dur="500" fill="hold"/>
-                                        <p:tgtEl>
-                                          <p:spTgt spid="4"/>
-                                        </p:tgtEl>
-                                        <p:attrNameLst>
-                                          <p:attrName>ppt_y</p:attrName>
-                                        </p:attrNameLst>
-                                      </p:cBhvr>
-                                      <p:tavLst>
-                                        <p:tav tm="0">
-                                          <p:val>
-                                            <p:strVal val="1+#ppt_h/2"/>
-                                          </p:val>
-                                        </p:tav>
-                                        <p:tav tm="100000">
-                                          <p:val>
-                                            <p:strVal val="#ppt_y"/>
-                                          </p:val>
-                                        </p:tav>
-                                      </p:tavLst>
-                                    </p:anim>
-                                  </p:childTnLst>
-                                </p:cTn>
-                              </p:par>
-                            </p:childTnLst>
-                          </p:cTn>
-                        </p:par>
-                      </p:childTnLst>
-                    </p:cTn>
-                  </p:par>
-                </p:childTnLst>
-              </p:cTn>
-              <p:prevCondLst>
-                <p:cond evt="onPrev" delay="0">
-                  <p:tgtEl>
-                    <p:sldTgt/>
-                  </p:tgtEl>
-                </p:cond>
-              </p:prevCondLst>
-              <p:nextCondLst>
-                <p:cond evt="onNext" delay="0">
-                  <p:tgtEl>
-                    <p:sldTgt/>
-                  </p:tgtEl>
-                </p:cond>
-              </p:nextCondLst>
-            </p:seq>
-          </p:childTnLst>
-        </p:cTn>
-      </p:par>
-    </p:tnLst>
-  </p:timing>
 </p:sld>
 </file>
 

--- a/revised presentation.pptx
+++ b/revised presentation.pptx
@@ -950,7 +950,7 @@
           <a:p>
             <a:fld id="{F223FF85-4E34-4546-B772-76DFA4A6051B}" type="datetimeFigureOut">
               <a:rPr lang="en-US" smtClean="0"/>
-              <a:t>5/10/2026</a:t>
+              <a:t>5/10/26</a:t>
             </a:fld>
             <a:endParaRPr lang="en-US"/>
           </a:p>
@@ -1127,7 +1127,7 @@
           <a:p>
             <a:fld id="{1B5CC398-6116-4BD2-9FAD-9822FDA158BE}" type="datetimeFigureOut">
               <a:rPr lang="en-US" smtClean="0"/>
-              <a:t>5/10/2026</a:t>
+              <a:t>5/10/26</a:t>
             </a:fld>
             <a:endParaRPr lang="en-US"/>
           </a:p>
@@ -1550,7 +1550,7 @@
           <a:p>
             <a:fld id="{38EFF46E-6B43-41F9-9272-B566D03A251C}" type="slidenum">
               <a:rPr lang="en-US" smtClean="0"/>
-              <a:t>6</a:t>
+              <a:t>7</a:t>
             </a:fld>
             <a:endParaRPr lang="en-US"/>
           </a:p>
@@ -1740,7 +1740,7 @@
           <a:p>
             <a:fld id="{B3CFBE15-E4BE-4B42-AEEE-ED6C6B9CFCE2}" type="datetime1">
               <a:rPr lang="en-US" smtClean="0"/>
-              <a:t>5/10/2026</a:t>
+              <a:t>5/10/26</a:t>
             </a:fld>
             <a:endParaRPr lang="en-US"/>
           </a:p>
@@ -1813,13 +1813,13 @@
   <p:clrMapOvr>
     <a:masterClrMapping/>
   </p:clrMapOvr>
-  <mc:AlternateContent xmlns:mc="http://schemas.openxmlformats.org/markup-compatibility/2006">
-    <mc:Choice xmlns:p14="http://schemas.microsoft.com/office/powerpoint/2010/main" Requires="p14">
+  <mc:AlternateContent xmlns:mc="http://schemas.openxmlformats.org/markup-compatibility/2006" xmlns:p14="http://schemas.microsoft.com/office/powerpoint/2010/main">
+    <mc:Choice Requires="p14">
       <p:transition spd="slow" p14:dur="1600">
         <p14:gallery dir="l"/>
       </p:transition>
     </mc:Choice>
-    <mc:Fallback>
+    <mc:Fallback xmlns="">
       <p:transition spd="slow">
         <p:fade/>
       </p:transition>
@@ -1972,7 +1972,7 @@
           <a:p>
             <a:fld id="{FF6B260B-9C30-8041-A127-55431CED219C}" type="datetime1">
               <a:rPr lang="en-US" smtClean="0"/>
-              <a:t>5/10/2026</a:t>
+              <a:t>5/10/26</a:t>
             </a:fld>
             <a:endParaRPr lang="en-US"/>
           </a:p>
@@ -2055,13 +2055,13 @@
   <p:clrMapOvr>
     <a:overrideClrMapping bg1="lt1" tx1="dk1" bg2="lt2" tx2="dk2" accent1="accent1" accent2="accent2" accent3="accent3" accent4="accent4" accent5="accent5" accent6="accent6" hlink="hlink" folHlink="folHlink"/>
   </p:clrMapOvr>
-  <mc:AlternateContent xmlns:mc="http://schemas.openxmlformats.org/markup-compatibility/2006">
-    <mc:Choice xmlns:p14="http://schemas.microsoft.com/office/powerpoint/2010/main" Requires="p14">
+  <mc:AlternateContent xmlns:mc="http://schemas.openxmlformats.org/markup-compatibility/2006" xmlns:p14="http://schemas.microsoft.com/office/powerpoint/2010/main">
+    <mc:Choice Requires="p14">
       <p:transition spd="slow" p14:dur="1600">
         <p14:gallery dir="l"/>
       </p:transition>
     </mc:Choice>
-    <mc:Fallback>
+    <mc:Fallback xmlns="">
       <p:transition spd="slow">
         <p:fade/>
       </p:transition>
@@ -2250,7 +2250,7 @@
           <a:p>
             <a:fld id="{F63FFE14-963B-F240-A047-D4733954729E}" type="datetime1">
               <a:rPr lang="en-US" smtClean="0"/>
-              <a:t>5/10/2026</a:t>
+              <a:t>5/10/26</a:t>
             </a:fld>
             <a:endParaRPr lang="en-US"/>
           </a:p>
@@ -2448,13 +2448,13 @@
   <p:clrMapOvr>
     <a:masterClrMapping/>
   </p:clrMapOvr>
-  <mc:AlternateContent xmlns:mc="http://schemas.openxmlformats.org/markup-compatibility/2006">
-    <mc:Choice xmlns:p14="http://schemas.microsoft.com/office/powerpoint/2010/main" Requires="p14">
+  <mc:AlternateContent xmlns:mc="http://schemas.openxmlformats.org/markup-compatibility/2006" xmlns:p14="http://schemas.microsoft.com/office/powerpoint/2010/main">
+    <mc:Choice Requires="p14">
       <p:transition spd="slow" p14:dur="1600">
         <p14:gallery dir="l"/>
       </p:transition>
     </mc:Choice>
-    <mc:Fallback>
+    <mc:Fallback xmlns="">
       <p:transition spd="slow">
         <p:fade/>
       </p:transition>
@@ -2584,7 +2584,7 @@
           <a:p>
             <a:fld id="{AEC70E42-D83C-0945-8790-6453F9081E20}" type="datetime1">
               <a:rPr lang="en-US" smtClean="0"/>
-              <a:t>5/10/2026</a:t>
+              <a:t>5/10/26</a:t>
             </a:fld>
             <a:endParaRPr lang="en-US"/>
           </a:p>
@@ -2782,13 +2782,13 @@
   <p:clrMapOvr>
     <a:masterClrMapping/>
   </p:clrMapOvr>
-  <mc:AlternateContent xmlns:mc="http://schemas.openxmlformats.org/markup-compatibility/2006">
-    <mc:Choice xmlns:p14="http://schemas.microsoft.com/office/powerpoint/2010/main" Requires="p14">
+  <mc:AlternateContent xmlns:mc="http://schemas.openxmlformats.org/markup-compatibility/2006" xmlns:p14="http://schemas.microsoft.com/office/powerpoint/2010/main">
+    <mc:Choice Requires="p14">
       <p:transition spd="slow" p14:dur="1600">
         <p14:gallery dir="l"/>
       </p:transition>
     </mc:Choice>
-    <mc:Fallback>
+    <mc:Fallback xmlns="">
       <p:transition spd="slow">
         <p:fade/>
       </p:transition>
@@ -2993,7 +2993,7 @@
           <a:p>
             <a:fld id="{BC14B53C-24D5-7E4A-A014-94F398D5C635}" type="datetime1">
               <a:rPr lang="en-US" smtClean="0"/>
-              <a:t>5/10/2026</a:t>
+              <a:t>5/10/26</a:t>
             </a:fld>
             <a:endParaRPr lang="en-US"/>
           </a:p>
@@ -3242,13 +3242,13 @@
   <p:clrMapOvr>
     <a:masterClrMapping/>
   </p:clrMapOvr>
-  <mc:AlternateContent xmlns:mc="http://schemas.openxmlformats.org/markup-compatibility/2006">
-    <mc:Choice xmlns:p14="http://schemas.microsoft.com/office/powerpoint/2010/main" Requires="p14">
+  <mc:AlternateContent xmlns:mc="http://schemas.openxmlformats.org/markup-compatibility/2006" xmlns:p14="http://schemas.microsoft.com/office/powerpoint/2010/main">
+    <mc:Choice Requires="p14">
       <p:transition spd="slow" p14:dur="1600">
         <p14:gallery dir="l"/>
       </p:transition>
     </mc:Choice>
-    <mc:Fallback>
+    <mc:Fallback xmlns="">
       <p:transition spd="slow">
         <p:fade/>
       </p:transition>
@@ -3365,7 +3365,7 @@
           <a:p>
             <a:fld id="{4123D06D-70B8-D14B-A67C-9271374366C3}" type="datetime1">
               <a:rPr lang="en-US" smtClean="0"/>
-              <a:t>5/10/2026</a:t>
+              <a:t>5/10/26</a:t>
             </a:fld>
             <a:endParaRPr lang="en-US"/>
           </a:p>
@@ -3500,13 +3500,13 @@
   <p:clrMapOvr>
     <a:masterClrMapping/>
   </p:clrMapOvr>
-  <mc:AlternateContent xmlns:mc="http://schemas.openxmlformats.org/markup-compatibility/2006">
-    <mc:Choice xmlns:p14="http://schemas.microsoft.com/office/powerpoint/2010/main" Requires="p14">
+  <mc:AlternateContent xmlns:mc="http://schemas.openxmlformats.org/markup-compatibility/2006" xmlns:p14="http://schemas.microsoft.com/office/powerpoint/2010/main">
+    <mc:Choice Requires="p14">
       <p:transition spd="slow" p14:dur="1600">
         <p14:gallery dir="l"/>
       </p:transition>
     </mc:Choice>
-    <mc:Fallback>
+    <mc:Fallback xmlns="">
       <p:transition spd="slow">
         <p:fade/>
       </p:transition>
@@ -3621,7 +3621,7 @@
           <a:p>
             <a:fld id="{75AE1D74-C13D-F14A-9B9E-EB7933559C88}" type="datetime1">
               <a:rPr lang="en-US" smtClean="0"/>
-              <a:t>5/10/2026</a:t>
+              <a:t>5/10/26</a:t>
             </a:fld>
             <a:endParaRPr lang="en-US"/>
           </a:p>
@@ -3756,13 +3756,13 @@
   <p:clrMapOvr>
     <a:masterClrMapping/>
   </p:clrMapOvr>
-  <mc:AlternateContent xmlns:mc="http://schemas.openxmlformats.org/markup-compatibility/2006">
-    <mc:Choice xmlns:p14="http://schemas.microsoft.com/office/powerpoint/2010/main" Requires="p14">
+  <mc:AlternateContent xmlns:mc="http://schemas.openxmlformats.org/markup-compatibility/2006" xmlns:p14="http://schemas.microsoft.com/office/powerpoint/2010/main">
+    <mc:Choice Requires="p14">
       <p:transition spd="slow" p14:dur="1600">
         <p14:gallery dir="l"/>
       </p:transition>
     </mc:Choice>
-    <mc:Fallback>
+    <mc:Fallback xmlns="">
       <p:transition spd="slow">
         <p:fade/>
       </p:transition>
@@ -3893,7 +3893,7 @@
           <a:p>
             <a:fld id="{04FB7707-CCB1-0246-9925-E5DB223369A7}" type="datetime1">
               <a:rPr lang="en-US" smtClean="0"/>
-              <a:t>5/10/2026</a:t>
+              <a:t>5/10/26</a:t>
             </a:fld>
             <a:endParaRPr lang="en-US"/>
           </a:p>
@@ -4089,13 +4089,13 @@
   <p:clrMapOvr>
     <a:masterClrMapping/>
   </p:clrMapOvr>
-  <mc:AlternateContent xmlns:mc="http://schemas.openxmlformats.org/markup-compatibility/2006">
-    <mc:Choice xmlns:p14="http://schemas.microsoft.com/office/powerpoint/2010/main" Requires="p14">
+  <mc:AlternateContent xmlns:mc="http://schemas.openxmlformats.org/markup-compatibility/2006" xmlns:p14="http://schemas.microsoft.com/office/powerpoint/2010/main">
+    <mc:Choice Requires="p14">
       <p:transition spd="slow" p14:dur="1600">
         <p14:gallery dir="l"/>
       </p:transition>
     </mc:Choice>
-    <mc:Fallback>
+    <mc:Fallback xmlns="">
       <p:transition spd="slow">
         <p:fade/>
       </p:transition>
@@ -4191,7 +4191,7 @@
           <a:p>
             <a:fld id="{AE76B46A-8201-CC4A-8088-50255B4B9D0D}" type="datetime1">
               <a:rPr lang="en-US" smtClean="0"/>
-              <a:t>5/10/2026</a:t>
+              <a:t>5/10/26</a:t>
             </a:fld>
             <a:endParaRPr lang="en-US"/>
           </a:p>
@@ -4387,13 +4387,13 @@
   <p:clrMapOvr>
     <a:masterClrMapping/>
   </p:clrMapOvr>
-  <mc:AlternateContent xmlns:mc="http://schemas.openxmlformats.org/markup-compatibility/2006">
-    <mc:Choice xmlns:p14="http://schemas.microsoft.com/office/powerpoint/2010/main" Requires="p14">
+  <mc:AlternateContent xmlns:mc="http://schemas.openxmlformats.org/markup-compatibility/2006" xmlns:p14="http://schemas.microsoft.com/office/powerpoint/2010/main">
+    <mc:Choice Requires="p14">
       <p:transition spd="slow" p14:dur="1600">
         <p14:gallery dir="l"/>
       </p:transition>
     </mc:Choice>
-    <mc:Fallback>
+    <mc:Fallback xmlns="">
       <p:transition spd="slow">
         <p:fade/>
       </p:transition>
@@ -4489,7 +4489,7 @@
           <a:p>
             <a:fld id="{0F2D9860-67F8-974D-8794-2C5A1B3DA504}" type="datetime1">
               <a:rPr lang="en-US" smtClean="0"/>
-              <a:t>5/10/2026</a:t>
+              <a:t>5/10/26</a:t>
             </a:fld>
             <a:endParaRPr lang="en-US"/>
           </a:p>
@@ -4628,13 +4628,13 @@
   <p:clrMapOvr>
     <a:masterClrMapping/>
   </p:clrMapOvr>
-  <mc:AlternateContent xmlns:mc="http://schemas.openxmlformats.org/markup-compatibility/2006">
-    <mc:Choice xmlns:p14="http://schemas.microsoft.com/office/powerpoint/2010/main" Requires="p14">
+  <mc:AlternateContent xmlns:mc="http://schemas.openxmlformats.org/markup-compatibility/2006" xmlns:p14="http://schemas.microsoft.com/office/powerpoint/2010/main">
+    <mc:Choice Requires="p14">
       <p:transition spd="slow" p14:dur="1600">
         <p14:gallery dir="l"/>
       </p:transition>
     </mc:Choice>
-    <mc:Fallback>
+    <mc:Fallback xmlns="">
       <p:transition spd="slow">
         <p:fade/>
       </p:transition>
@@ -4730,7 +4730,7 @@
           <a:p>
             <a:fld id="{8351A969-2D26-4F49-AF79-EF4D76632F71}" type="datetime1">
               <a:rPr lang="en-US" smtClean="0"/>
-              <a:t>5/10/2026</a:t>
+              <a:t>5/10/26</a:t>
             </a:fld>
             <a:endParaRPr lang="en-US"/>
           </a:p>
@@ -4926,13 +4926,13 @@
   <p:clrMapOvr>
     <a:masterClrMapping/>
   </p:clrMapOvr>
-  <mc:AlternateContent xmlns:mc="http://schemas.openxmlformats.org/markup-compatibility/2006">
-    <mc:Choice xmlns:p14="http://schemas.microsoft.com/office/powerpoint/2010/main" Requires="p14">
+  <mc:AlternateContent xmlns:mc="http://schemas.openxmlformats.org/markup-compatibility/2006" xmlns:p14="http://schemas.microsoft.com/office/powerpoint/2010/main">
+    <mc:Choice Requires="p14">
       <p:transition spd="slow" p14:dur="1600">
         <p14:gallery dir="l"/>
       </p:transition>
     </mc:Choice>
-    <mc:Fallback>
+    <mc:Fallback xmlns="">
       <p:transition spd="slow">
         <p:fade/>
       </p:transition>
@@ -5024,7 +5024,7 @@
           <a:p>
             <a:fld id="{94040C0B-3638-F744-9F98-D66CEC428329}" type="datetime1">
               <a:rPr lang="en-US" smtClean="0"/>
-              <a:t>5/10/2026</a:t>
+              <a:t>5/10/26</a:t>
             </a:fld>
             <a:endParaRPr lang="en-US"/>
           </a:p>
@@ -5168,13 +5168,13 @@
   <p:clrMapOvr>
     <a:masterClrMapping/>
   </p:clrMapOvr>
-  <mc:AlternateContent xmlns:mc="http://schemas.openxmlformats.org/markup-compatibility/2006">
-    <mc:Choice xmlns:p14="http://schemas.microsoft.com/office/powerpoint/2010/main" Requires="p14">
+  <mc:AlternateContent xmlns:mc="http://schemas.openxmlformats.org/markup-compatibility/2006" xmlns:p14="http://schemas.microsoft.com/office/powerpoint/2010/main">
+    <mc:Choice Requires="p14">
       <p:transition spd="slow" p14:dur="1600">
         <p14:gallery dir="l"/>
       </p:transition>
     </mc:Choice>
-    <mc:Fallback>
+    <mc:Fallback xmlns="">
       <p:transition spd="slow">
         <p:fade/>
       </p:transition>
@@ -5381,7 +5381,7 @@
           <a:p>
             <a:fld id="{383FCCD6-08E9-5F43-B78A-D6D06FA7D888}" type="datetime1">
               <a:rPr lang="en-US" smtClean="0"/>
-              <a:t>5/10/2026</a:t>
+              <a:t>5/10/26</a:t>
             </a:fld>
             <a:endParaRPr lang="en-US" dirty="0"/>
           </a:p>
@@ -5649,13 +5649,13 @@
   <p:clrMapOvr>
     <a:masterClrMapping/>
   </p:clrMapOvr>
-  <mc:AlternateContent xmlns:mc="http://schemas.openxmlformats.org/markup-compatibility/2006">
-    <mc:Choice xmlns:p14="http://schemas.microsoft.com/office/powerpoint/2010/main" Requires="p14">
+  <mc:AlternateContent xmlns:mc="http://schemas.openxmlformats.org/markup-compatibility/2006" xmlns:p14="http://schemas.microsoft.com/office/powerpoint/2010/main">
+    <mc:Choice Requires="p14">
       <p:transition spd="slow" p14:dur="1600">
         <p14:gallery dir="l"/>
       </p:transition>
     </mc:Choice>
-    <mc:Fallback>
+    <mc:Fallback xmlns="">
       <p:transition spd="slow">
         <p:fade/>
       </p:transition>
@@ -5855,7 +5855,7 @@
           <a:p>
             <a:fld id="{7D5752D2-CCDE-DA48-AA88-B770548F7575}" type="datetime1">
               <a:rPr lang="en-US" smtClean="0"/>
-              <a:t>5/10/2026</a:t>
+              <a:t>5/10/26</a:t>
             </a:fld>
             <a:endParaRPr lang="en-US"/>
           </a:p>
@@ -6095,13 +6095,13 @@
   <p:clrMapOvr>
     <a:masterClrMapping/>
   </p:clrMapOvr>
-  <mc:AlternateContent xmlns:mc="http://schemas.openxmlformats.org/markup-compatibility/2006">
-    <mc:Choice xmlns:p14="http://schemas.microsoft.com/office/powerpoint/2010/main" Requires="p14">
+  <mc:AlternateContent xmlns:mc="http://schemas.openxmlformats.org/markup-compatibility/2006" xmlns:p14="http://schemas.microsoft.com/office/powerpoint/2010/main">
+    <mc:Choice Requires="p14">
       <p:transition spd="slow" p14:dur="1600">
         <p14:gallery dir="l"/>
       </p:transition>
     </mc:Choice>
-    <mc:Fallback>
+    <mc:Fallback xmlns="">
       <p:transition spd="slow">
         <p:fade/>
       </p:transition>
@@ -6305,7 +6305,7 @@
           <a:p>
             <a:fld id="{2E2458BC-FE32-0A45-9DD7-ED7D64447D19}" type="datetime1">
               <a:rPr lang="en-US" smtClean="0"/>
-              <a:t>5/10/2026</a:t>
+              <a:t>5/10/26</a:t>
             </a:fld>
             <a:endParaRPr lang="en-US" dirty="0"/>
           </a:p>
@@ -6505,13 +6505,13 @@
   <p:clrMapOvr>
     <a:masterClrMapping/>
   </p:clrMapOvr>
-  <mc:AlternateContent xmlns:mc="http://schemas.openxmlformats.org/markup-compatibility/2006">
-    <mc:Choice xmlns:p14="http://schemas.microsoft.com/office/powerpoint/2010/main" Requires="p14">
+  <mc:AlternateContent xmlns:mc="http://schemas.openxmlformats.org/markup-compatibility/2006" xmlns:p14="http://schemas.microsoft.com/office/powerpoint/2010/main">
+    <mc:Choice Requires="p14">
       <p:transition spd="slow" p14:dur="1600">
         <p14:gallery dir="l"/>
       </p:transition>
     </mc:Choice>
-    <mc:Fallback>
+    <mc:Fallback xmlns="">
       <p:transition spd="slow">
         <p:fade/>
       </p:transition>
@@ -6715,7 +6715,7 @@
           <a:p>
             <a:fld id="{1233975F-0E53-0840-98CD-E03B319E6BC3}" type="datetime1">
               <a:rPr lang="en-US" smtClean="0"/>
-              <a:t>5/10/2026</a:t>
+              <a:t>5/10/26</a:t>
             </a:fld>
             <a:endParaRPr lang="en-US" dirty="0"/>
           </a:p>
@@ -6915,13 +6915,13 @@
   <p:clrMapOvr>
     <a:masterClrMapping/>
   </p:clrMapOvr>
-  <mc:AlternateContent xmlns:mc="http://schemas.openxmlformats.org/markup-compatibility/2006">
-    <mc:Choice xmlns:p14="http://schemas.microsoft.com/office/powerpoint/2010/main" Requires="p14">
+  <mc:AlternateContent xmlns:mc="http://schemas.openxmlformats.org/markup-compatibility/2006" xmlns:p14="http://schemas.microsoft.com/office/powerpoint/2010/main">
+    <mc:Choice Requires="p14">
       <p:transition spd="slow" p14:dur="1600">
         <p14:gallery dir="l"/>
       </p:transition>
     </mc:Choice>
-    <mc:Fallback>
+    <mc:Fallback xmlns="">
       <p:transition spd="slow">
         <p:fade/>
       </p:transition>
@@ -7011,7 +7011,7 @@
           <a:p>
             <a:fld id="{D0CA20AB-D25D-704E-83C3-6B013E02E645}" type="datetime1">
               <a:rPr lang="en-US" smtClean="0"/>
-              <a:t>5/10/2026</a:t>
+              <a:t>5/10/26</a:t>
             </a:fld>
             <a:endParaRPr lang="en-US" dirty="0"/>
           </a:p>
@@ -7229,13 +7229,13 @@
   <p:clrMapOvr>
     <a:masterClrMapping/>
   </p:clrMapOvr>
-  <mc:AlternateContent xmlns:mc="http://schemas.openxmlformats.org/markup-compatibility/2006">
-    <mc:Choice xmlns:p14="http://schemas.microsoft.com/office/powerpoint/2010/main" Requires="p14">
+  <mc:AlternateContent xmlns:mc="http://schemas.openxmlformats.org/markup-compatibility/2006" xmlns:p14="http://schemas.microsoft.com/office/powerpoint/2010/main">
+    <mc:Choice Requires="p14">
       <p:transition spd="slow" p14:dur="1600">
         <p14:gallery dir="l"/>
       </p:transition>
     </mc:Choice>
-    <mc:Fallback>
+    <mc:Fallback xmlns="">
       <p:transition spd="slow">
         <p:fade/>
       </p:transition>
@@ -7325,7 +7325,7 @@
           <a:p>
             <a:fld id="{B31F77D0-31D8-5446-A1F3-FE6147C324EC}" type="datetime1">
               <a:rPr lang="en-US" smtClean="0"/>
-              <a:t>5/10/2026</a:t>
+              <a:t>5/10/26</a:t>
             </a:fld>
             <a:endParaRPr lang="en-US" dirty="0"/>
           </a:p>
@@ -7543,13 +7543,13 @@
   <p:clrMapOvr>
     <a:masterClrMapping/>
   </p:clrMapOvr>
-  <mc:AlternateContent xmlns:mc="http://schemas.openxmlformats.org/markup-compatibility/2006">
-    <mc:Choice xmlns:p14="http://schemas.microsoft.com/office/powerpoint/2010/main" Requires="p14">
+  <mc:AlternateContent xmlns:mc="http://schemas.openxmlformats.org/markup-compatibility/2006" xmlns:p14="http://schemas.microsoft.com/office/powerpoint/2010/main">
+    <mc:Choice Requires="p14">
       <p:transition spd="slow" p14:dur="1600">
         <p14:gallery dir="l"/>
       </p:transition>
     </mc:Choice>
-    <mc:Fallback>
+    <mc:Fallback xmlns="">
       <p:transition spd="slow">
         <p:fade/>
       </p:transition>
@@ -7749,7 +7749,7 @@
           <a:p>
             <a:fld id="{2005CF00-6C05-B849-B141-54CC9A394B3C}" type="datetime1">
               <a:rPr lang="en-US" smtClean="0"/>
-              <a:t>5/10/2026</a:t>
+              <a:t>5/10/26</a:t>
             </a:fld>
             <a:endParaRPr lang="en-US"/>
           </a:p>
@@ -7959,13 +7959,13 @@
   <p:clrMapOvr>
     <a:masterClrMapping/>
   </p:clrMapOvr>
-  <mc:AlternateContent xmlns:mc="http://schemas.openxmlformats.org/markup-compatibility/2006">
-    <mc:Choice xmlns:p14="http://schemas.microsoft.com/office/powerpoint/2010/main" Requires="p14">
+  <mc:AlternateContent xmlns:mc="http://schemas.openxmlformats.org/markup-compatibility/2006" xmlns:p14="http://schemas.microsoft.com/office/powerpoint/2010/main">
+    <mc:Choice Requires="p14">
       <p:transition spd="slow" p14:dur="1600">
         <p14:gallery dir="l"/>
       </p:transition>
     </mc:Choice>
-    <mc:Fallback>
+    <mc:Fallback xmlns="">
       <p:transition spd="slow">
         <p:fade/>
       </p:transition>
@@ -8170,7 +8170,7 @@
           <a:p>
             <a:fld id="{66499679-3EA0-9342-AF62-C5FAA18B6EFA}" type="datetime1">
               <a:rPr lang="en-US" smtClean="0"/>
-              <a:t>5/10/2026</a:t>
+              <a:t>5/10/26</a:t>
             </a:fld>
             <a:endParaRPr lang="en-US" dirty="0"/>
           </a:p>
@@ -8389,13 +8389,13 @@
   <p:clrMapOvr>
     <a:masterClrMapping/>
   </p:clrMapOvr>
-  <mc:AlternateContent xmlns:mc="http://schemas.openxmlformats.org/markup-compatibility/2006">
-    <mc:Choice xmlns:p14="http://schemas.microsoft.com/office/powerpoint/2010/main" Requires="p14">
+  <mc:AlternateContent xmlns:mc="http://schemas.openxmlformats.org/markup-compatibility/2006" xmlns:p14="http://schemas.microsoft.com/office/powerpoint/2010/main">
+    <mc:Choice Requires="p14">
       <p:transition spd="slow" p14:dur="1600">
         <p14:gallery dir="l"/>
       </p:transition>
     </mc:Choice>
-    <mc:Fallback>
+    <mc:Fallback xmlns="">
       <p:transition spd="slow">
         <p:fade/>
       </p:transition>
@@ -8593,7 +8593,7 @@
           <a:p>
             <a:fld id="{3C97155C-DE68-4440-8202-CC9478E27F07}" type="datetime1">
               <a:rPr lang="en-US" smtClean="0"/>
-              <a:t>5/10/2026</a:t>
+              <a:t>5/10/26</a:t>
             </a:fld>
             <a:endParaRPr lang="en-US" dirty="0"/>
           </a:p>
@@ -8841,13 +8841,13 @@
   <p:clrMapOvr>
     <a:masterClrMapping/>
   </p:clrMapOvr>
-  <mc:AlternateContent xmlns:mc="http://schemas.openxmlformats.org/markup-compatibility/2006">
-    <mc:Choice xmlns:p14="http://schemas.microsoft.com/office/powerpoint/2010/main" Requires="p14">
+  <mc:AlternateContent xmlns:mc="http://schemas.openxmlformats.org/markup-compatibility/2006" xmlns:p14="http://schemas.microsoft.com/office/powerpoint/2010/main">
+    <mc:Choice Requires="p14">
       <p:transition spd="slow" p14:dur="1600">
         <p14:gallery dir="l"/>
       </p:transition>
     </mc:Choice>
-    <mc:Fallback>
+    <mc:Fallback xmlns="">
       <p:transition spd="slow">
         <p:fade/>
       </p:transition>
@@ -9045,7 +9045,7 @@
           <a:p>
             <a:fld id="{2B9DA8F7-1BE7-954A-B654-92996DBA4E86}" type="datetime1">
               <a:rPr lang="en-US" smtClean="0"/>
-              <a:t>5/10/2026</a:t>
+              <a:t>5/10/26</a:t>
             </a:fld>
             <a:endParaRPr lang="en-US" dirty="0"/>
           </a:p>
@@ -9293,13 +9293,13 @@
   <p:clrMapOvr>
     <a:masterClrMapping/>
   </p:clrMapOvr>
-  <mc:AlternateContent xmlns:mc="http://schemas.openxmlformats.org/markup-compatibility/2006">
-    <mc:Choice xmlns:p14="http://schemas.microsoft.com/office/powerpoint/2010/main" Requires="p14">
+  <mc:AlternateContent xmlns:mc="http://schemas.openxmlformats.org/markup-compatibility/2006" xmlns:p14="http://schemas.microsoft.com/office/powerpoint/2010/main">
+    <mc:Choice Requires="p14">
       <p:transition spd="slow" p14:dur="1600">
         <p14:gallery dir="l"/>
       </p:transition>
     </mc:Choice>
-    <mc:Fallback>
+    <mc:Fallback xmlns="">
       <p:transition spd="slow">
         <p:fade/>
       </p:transition>
@@ -9470,7 +9470,7 @@
           <a:p>
             <a:fld id="{D9EF7764-3766-AD43-917F-3181D2483C36}" type="datetime1">
               <a:rPr lang="en-US" smtClean="0"/>
-              <a:t>5/10/2026</a:t>
+              <a:t>5/10/26</a:t>
             </a:fld>
             <a:endParaRPr lang="en-US"/>
           </a:p>
@@ -9593,13 +9593,13 @@
   <p:clrMapOvr>
     <a:masterClrMapping/>
   </p:clrMapOvr>
-  <mc:AlternateContent xmlns:mc="http://schemas.openxmlformats.org/markup-compatibility/2006">
-    <mc:Choice xmlns:p14="http://schemas.microsoft.com/office/powerpoint/2010/main" Requires="p14">
+  <mc:AlternateContent xmlns:mc="http://schemas.openxmlformats.org/markup-compatibility/2006" xmlns:p14="http://schemas.microsoft.com/office/powerpoint/2010/main">
+    <mc:Choice Requires="p14">
       <p:transition spd="slow" p14:dur="1600">
         <p14:gallery dir="l"/>
       </p:transition>
     </mc:Choice>
-    <mc:Fallback>
+    <mc:Fallback xmlns="">
       <p:transition spd="slow">
         <p:fade/>
       </p:transition>
@@ -9819,7 +9819,7 @@
           <a:p>
             <a:fld id="{5447FF96-6068-D045-B983-6A2E1F44124F}" type="datetime1">
               <a:rPr lang="en-US" smtClean="0"/>
-              <a:t>5/10/2026</a:t>
+              <a:t>5/10/26</a:t>
             </a:fld>
             <a:endParaRPr lang="en-US" dirty="0"/>
           </a:p>
@@ -10069,13 +10069,13 @@
   <p:clrMapOvr>
     <a:overrideClrMapping bg1="lt1" tx1="dk1" bg2="lt2" tx2="dk2" accent1="accent1" accent2="accent2" accent3="accent3" accent4="accent4" accent5="accent5" accent6="accent6" hlink="hlink" folHlink="folHlink"/>
   </p:clrMapOvr>
-  <mc:AlternateContent xmlns:mc="http://schemas.openxmlformats.org/markup-compatibility/2006">
-    <mc:Choice xmlns:p14="http://schemas.microsoft.com/office/powerpoint/2010/main" Requires="p14">
+  <mc:AlternateContent xmlns:mc="http://schemas.openxmlformats.org/markup-compatibility/2006" xmlns:p14="http://schemas.microsoft.com/office/powerpoint/2010/main">
+    <mc:Choice Requires="p14">
       <p:transition spd="slow" p14:dur="1600">
         <p14:gallery dir="l"/>
       </p:transition>
     </mc:Choice>
-    <mc:Fallback>
+    <mc:Fallback xmlns="">
       <p:transition spd="slow">
         <p:fade/>
       </p:transition>
@@ -10290,7 +10290,7 @@
           <a:p>
             <a:fld id="{C195F3F8-9E31-7F42-8188-F6043F071A39}" type="datetime1">
               <a:rPr lang="en-US" smtClean="0"/>
-              <a:t>5/10/2026</a:t>
+              <a:t>5/10/26</a:t>
             </a:fld>
             <a:endParaRPr lang="en-US" dirty="0"/>
           </a:p>
@@ -10540,13 +10540,13 @@
   <p:clrMapOvr>
     <a:masterClrMapping/>
   </p:clrMapOvr>
-  <mc:AlternateContent xmlns:mc="http://schemas.openxmlformats.org/markup-compatibility/2006">
-    <mc:Choice xmlns:p14="http://schemas.microsoft.com/office/powerpoint/2010/main" Requires="p14">
+  <mc:AlternateContent xmlns:mc="http://schemas.openxmlformats.org/markup-compatibility/2006" xmlns:p14="http://schemas.microsoft.com/office/powerpoint/2010/main">
+    <mc:Choice Requires="p14">
       <p:transition spd="slow" p14:dur="1600">
         <p14:gallery dir="l"/>
       </p:transition>
     </mc:Choice>
-    <mc:Fallback>
+    <mc:Fallback xmlns="">
       <p:transition spd="slow">
         <p:fade/>
       </p:transition>
@@ -10744,7 +10744,7 @@
           <a:p>
             <a:fld id="{AE8BA31F-10E3-B74C-A113-9DB8A6700F67}" type="datetime1">
               <a:rPr lang="en-US" smtClean="0"/>
-              <a:t>5/10/2026</a:t>
+              <a:t>5/10/26</a:t>
             </a:fld>
             <a:endParaRPr lang="en-US" dirty="0"/>
           </a:p>
@@ -10994,13 +10994,13 @@
   <p:clrMapOvr>
     <a:masterClrMapping/>
   </p:clrMapOvr>
-  <mc:AlternateContent xmlns:mc="http://schemas.openxmlformats.org/markup-compatibility/2006">
-    <mc:Choice xmlns:p14="http://schemas.microsoft.com/office/powerpoint/2010/main" Requires="p14">
+  <mc:AlternateContent xmlns:mc="http://schemas.openxmlformats.org/markup-compatibility/2006" xmlns:p14="http://schemas.microsoft.com/office/powerpoint/2010/main">
+    <mc:Choice Requires="p14">
       <p:transition spd="slow" p14:dur="1600">
         <p14:gallery dir="l"/>
       </p:transition>
     </mc:Choice>
-    <mc:Fallback>
+    <mc:Fallback xmlns="">
       <p:transition spd="slow">
         <p:fade/>
       </p:transition>
@@ -11090,7 +11090,7 @@
           <a:p>
             <a:fld id="{3596BBB1-49AB-C544-9861-84EE6CF53403}" type="datetime1">
               <a:rPr lang="en-US" smtClean="0"/>
-              <a:t>5/10/2026</a:t>
+              <a:t>5/10/26</a:t>
             </a:fld>
             <a:endParaRPr lang="en-US" dirty="0"/>
           </a:p>
@@ -11290,13 +11290,13 @@
   <p:clrMapOvr>
     <a:masterClrMapping/>
   </p:clrMapOvr>
-  <mc:AlternateContent xmlns:mc="http://schemas.openxmlformats.org/markup-compatibility/2006">
-    <mc:Choice xmlns:p14="http://schemas.microsoft.com/office/powerpoint/2010/main" Requires="p14">
+  <mc:AlternateContent xmlns:mc="http://schemas.openxmlformats.org/markup-compatibility/2006" xmlns:p14="http://schemas.microsoft.com/office/powerpoint/2010/main">
+    <mc:Choice Requires="p14">
       <p:transition spd="slow" p14:dur="1600">
         <p14:gallery dir="l"/>
       </p:transition>
     </mc:Choice>
-    <mc:Fallback>
+    <mc:Fallback xmlns="">
       <p:transition spd="slow">
         <p:fade/>
       </p:transition>
@@ -11386,7 +11386,7 @@
           <a:p>
             <a:fld id="{9D50FFC8-0737-944F-9B20-403A2248B3E7}" type="datetime1">
               <a:rPr lang="en-US" smtClean="0"/>
-              <a:t>5/10/2026</a:t>
+              <a:t>5/10/26</a:t>
             </a:fld>
             <a:endParaRPr lang="en-US" dirty="0"/>
           </a:p>
@@ -11586,13 +11586,13 @@
   <p:clrMapOvr>
     <a:masterClrMapping/>
   </p:clrMapOvr>
-  <mc:AlternateContent xmlns:mc="http://schemas.openxmlformats.org/markup-compatibility/2006">
-    <mc:Choice xmlns:p14="http://schemas.microsoft.com/office/powerpoint/2010/main" Requires="p14">
+  <mc:AlternateContent xmlns:mc="http://schemas.openxmlformats.org/markup-compatibility/2006" xmlns:p14="http://schemas.microsoft.com/office/powerpoint/2010/main">
+    <mc:Choice Requires="p14">
       <p:transition spd="slow" p14:dur="1600">
         <p14:gallery dir="l"/>
       </p:transition>
     </mc:Choice>
-    <mc:Fallback>
+    <mc:Fallback xmlns="">
       <p:transition spd="slow">
         <p:fade/>
       </p:transition>
@@ -11792,7 +11792,7 @@
           <a:p>
             <a:fld id="{FE45DA7B-3D23-9747-B64E-78D5DD68C6C7}" type="datetime1">
               <a:rPr lang="en-US" smtClean="0"/>
-              <a:t>5/10/2026</a:t>
+              <a:t>5/10/26</a:t>
             </a:fld>
             <a:endParaRPr lang="en-US"/>
           </a:p>
@@ -11983,13 +11983,13 @@
   <p:clrMapOvr>
     <a:masterClrMapping/>
   </p:clrMapOvr>
-  <mc:AlternateContent xmlns:mc="http://schemas.openxmlformats.org/markup-compatibility/2006">
-    <mc:Choice xmlns:p14="http://schemas.microsoft.com/office/powerpoint/2010/main" Requires="p14">
+  <mc:AlternateContent xmlns:mc="http://schemas.openxmlformats.org/markup-compatibility/2006" xmlns:p14="http://schemas.microsoft.com/office/powerpoint/2010/main">
+    <mc:Choice Requires="p14">
       <p:transition spd="slow" p14:dur="1600">
         <p14:gallery dir="l"/>
       </p:transition>
     </mc:Choice>
-    <mc:Fallback>
+    <mc:Fallback xmlns="">
       <p:transition spd="slow">
         <p:fade/>
       </p:transition>
@@ -12189,7 +12189,7 @@
           <a:p>
             <a:fld id="{313040DD-291F-D14A-B0CD-056B01183946}" type="datetime1">
               <a:rPr lang="en-US" smtClean="0"/>
-              <a:t>5/10/2026</a:t>
+              <a:t>5/10/26</a:t>
             </a:fld>
             <a:endParaRPr lang="en-US"/>
           </a:p>
@@ -12380,13 +12380,13 @@
   <p:clrMapOvr>
     <a:masterClrMapping/>
   </p:clrMapOvr>
-  <mc:AlternateContent xmlns:mc="http://schemas.openxmlformats.org/markup-compatibility/2006">
-    <mc:Choice xmlns:p14="http://schemas.microsoft.com/office/powerpoint/2010/main" Requires="p14">
+  <mc:AlternateContent xmlns:mc="http://schemas.openxmlformats.org/markup-compatibility/2006" xmlns:p14="http://schemas.microsoft.com/office/powerpoint/2010/main">
+    <mc:Choice Requires="p14">
       <p:transition spd="slow" p14:dur="1600">
         <p14:gallery dir="l"/>
       </p:transition>
     </mc:Choice>
-    <mc:Fallback>
+    <mc:Fallback xmlns="">
       <p:transition spd="slow">
         <p:fade/>
       </p:transition>
@@ -12525,7 +12525,7 @@
           <a:p>
             <a:fld id="{F20AA6F4-6FEB-A645-BC84-8FD86BB56A56}" type="datetime1">
               <a:rPr lang="en-US" smtClean="0"/>
-              <a:t>5/10/2026</a:t>
+              <a:t>5/10/26</a:t>
             </a:fld>
             <a:endParaRPr lang="en-US"/>
           </a:p>
@@ -12658,13 +12658,13 @@
   <p:clrMapOvr>
     <a:overrideClrMapping bg1="lt1" tx1="dk1" bg2="lt2" tx2="dk2" accent1="accent1" accent2="accent2" accent3="accent3" accent4="accent4" accent5="accent5" accent6="accent6" hlink="hlink" folHlink="folHlink"/>
   </p:clrMapOvr>
-  <mc:AlternateContent xmlns:mc="http://schemas.openxmlformats.org/markup-compatibility/2006">
-    <mc:Choice xmlns:p14="http://schemas.microsoft.com/office/powerpoint/2010/main" Requires="p14">
+  <mc:AlternateContent xmlns:mc="http://schemas.openxmlformats.org/markup-compatibility/2006" xmlns:p14="http://schemas.microsoft.com/office/powerpoint/2010/main">
+    <mc:Choice Requires="p14">
       <p:transition spd="slow" p14:dur="1600">
         <p14:gallery dir="l"/>
       </p:transition>
     </mc:Choice>
-    <mc:Fallback>
+    <mc:Fallback xmlns="">
       <p:transition spd="slow">
         <p:fade/>
       </p:transition>
@@ -12803,7 +12803,7 @@
           <a:p>
             <a:fld id="{019C1F0A-369C-694C-9034-23649A99EDDB}" type="datetime1">
               <a:rPr lang="en-US" smtClean="0"/>
-              <a:t>5/10/2026</a:t>
+              <a:t>5/10/26</a:t>
             </a:fld>
             <a:endParaRPr lang="en-US" dirty="0"/>
           </a:p>
@@ -12936,13 +12936,13 @@
   <p:clrMapOvr>
     <a:overrideClrMapping bg1="lt1" tx1="dk1" bg2="lt2" tx2="dk2" accent1="accent1" accent2="accent2" accent3="accent3" accent4="accent4" accent5="accent5" accent6="accent6" hlink="hlink" folHlink="folHlink"/>
   </p:clrMapOvr>
-  <mc:AlternateContent xmlns:mc="http://schemas.openxmlformats.org/markup-compatibility/2006">
-    <mc:Choice xmlns:p14="http://schemas.microsoft.com/office/powerpoint/2010/main" Requires="p14">
+  <mc:AlternateContent xmlns:mc="http://schemas.openxmlformats.org/markup-compatibility/2006" xmlns:p14="http://schemas.microsoft.com/office/powerpoint/2010/main">
+    <mc:Choice Requires="p14">
       <p:transition spd="slow" p14:dur="1600">
         <p14:gallery dir="l"/>
       </p:transition>
     </mc:Choice>
-    <mc:Fallback>
+    <mc:Fallback xmlns="">
       <p:transition spd="slow">
         <p:fade/>
       </p:transition>
@@ -13081,7 +13081,7 @@
           <a:p>
             <a:fld id="{C05CB68B-3B3F-204E-812A-7CA74DAAFECC}" type="datetime1">
               <a:rPr lang="en-US" smtClean="0"/>
-              <a:t>5/10/2026</a:t>
+              <a:t>5/10/26</a:t>
             </a:fld>
             <a:endParaRPr lang="en-US" dirty="0"/>
           </a:p>
@@ -13214,13 +13214,13 @@
   <p:clrMapOvr>
     <a:overrideClrMapping bg1="lt1" tx1="dk1" bg2="lt2" tx2="dk2" accent1="accent1" accent2="accent2" accent3="accent3" accent4="accent4" accent5="accent5" accent6="accent6" hlink="hlink" folHlink="folHlink"/>
   </p:clrMapOvr>
-  <mc:AlternateContent xmlns:mc="http://schemas.openxmlformats.org/markup-compatibility/2006">
-    <mc:Choice xmlns:p14="http://schemas.microsoft.com/office/powerpoint/2010/main" Requires="p14">
+  <mc:AlternateContent xmlns:mc="http://schemas.openxmlformats.org/markup-compatibility/2006" xmlns:p14="http://schemas.microsoft.com/office/powerpoint/2010/main">
+    <mc:Choice Requires="p14">
       <p:transition spd="slow" p14:dur="1600">
         <p14:gallery dir="l"/>
       </p:transition>
     </mc:Choice>
-    <mc:Fallback>
+    <mc:Fallback xmlns="">
       <p:transition spd="slow">
         <p:fade/>
       </p:transition>
@@ -13474,7 +13474,7 @@
           <a:p>
             <a:fld id="{BD2E1884-4CA3-F14A-A3FE-9D94D32D34BF}" type="datetime1">
               <a:rPr lang="en-US" smtClean="0"/>
-              <a:t>5/10/2026</a:t>
+              <a:t>5/10/26</a:t>
             </a:fld>
             <a:endParaRPr lang="en-US"/>
           </a:p>
@@ -13608,13 +13608,13 @@
   <p:clrMapOvr>
     <a:masterClrMapping/>
   </p:clrMapOvr>
-  <mc:AlternateContent xmlns:mc="http://schemas.openxmlformats.org/markup-compatibility/2006">
-    <mc:Choice xmlns:p14="http://schemas.microsoft.com/office/powerpoint/2010/main" Requires="p14">
+  <mc:AlternateContent xmlns:mc="http://schemas.openxmlformats.org/markup-compatibility/2006" xmlns:p14="http://schemas.microsoft.com/office/powerpoint/2010/main">
+    <mc:Choice Requires="p14">
       <p:transition spd="slow" p14:dur="1600">
         <p14:gallery dir="l"/>
       </p:transition>
     </mc:Choice>
-    <mc:Fallback>
+    <mc:Fallback xmlns="">
       <p:transition spd="slow">
         <p:fade/>
       </p:transition>
@@ -13755,7 +13755,7 @@
           <a:p>
             <a:fld id="{D963A025-A5F8-BC41-857C-074A129970DD}" type="datetime1">
               <a:rPr lang="en-US" smtClean="0"/>
-              <a:t>5/10/2026</a:t>
+              <a:t>5/10/26</a:t>
             </a:fld>
             <a:endParaRPr lang="en-US"/>
           </a:p>
@@ -13953,13 +13953,13 @@
   <p:clrMapOvr>
     <a:overrideClrMapping bg1="lt1" tx1="dk1" bg2="lt2" tx2="dk2" accent1="accent1" accent2="accent2" accent3="accent3" accent4="accent4" accent5="accent5" accent6="accent6" hlink="hlink" folHlink="folHlink"/>
   </p:clrMapOvr>
-  <mc:AlternateContent xmlns:mc="http://schemas.openxmlformats.org/markup-compatibility/2006">
-    <mc:Choice xmlns:p14="http://schemas.microsoft.com/office/powerpoint/2010/main" Requires="p14">
+  <mc:AlternateContent xmlns:mc="http://schemas.openxmlformats.org/markup-compatibility/2006" xmlns:p14="http://schemas.microsoft.com/office/powerpoint/2010/main">
+    <mc:Choice Requires="p14">
       <p:transition spd="slow" p14:dur="1600">
         <p14:gallery dir="l"/>
       </p:transition>
     </mc:Choice>
-    <mc:Fallback>
+    <mc:Fallback xmlns="">
       <p:transition spd="slow">
         <p:fade/>
       </p:transition>
@@ -14084,7 +14084,7 @@
           <a:p>
             <a:fld id="{67E1A02B-DBB0-A046-81B0-FEDCAC57CE71}" type="datetime1">
               <a:rPr lang="en-US" smtClean="0"/>
-              <a:t>5/10/2026</a:t>
+              <a:t>5/10/26</a:t>
             </a:fld>
             <a:endParaRPr lang="en-US"/>
           </a:p>
@@ -14282,13 +14282,13 @@
   <p:clrMapOvr>
     <a:overrideClrMapping bg1="lt1" tx1="dk1" bg2="lt2" tx2="dk2" accent1="accent1" accent2="accent2" accent3="accent3" accent4="accent4" accent5="accent5" accent6="accent6" hlink="hlink" folHlink="folHlink"/>
   </p:clrMapOvr>
-  <mc:AlternateContent xmlns:mc="http://schemas.openxmlformats.org/markup-compatibility/2006">
-    <mc:Choice xmlns:p14="http://schemas.microsoft.com/office/powerpoint/2010/main" Requires="p14">
+  <mc:AlternateContent xmlns:mc="http://schemas.openxmlformats.org/markup-compatibility/2006" xmlns:p14="http://schemas.microsoft.com/office/powerpoint/2010/main">
+    <mc:Choice Requires="p14">
       <p:transition spd="slow" p14:dur="1600">
         <p14:gallery dir="l"/>
       </p:transition>
     </mc:Choice>
-    <mc:Fallback>
+    <mc:Fallback xmlns="">
       <p:transition spd="slow">
         <p:fade/>
       </p:transition>
@@ -14421,7 +14421,7 @@
           <a:p>
             <a:fld id="{192E1041-C021-CE4A-9D2F-9EE16EB193AE}" type="datetime1">
               <a:rPr lang="en-US" smtClean="0"/>
-              <a:t>5/10/2026</a:t>
+              <a:t>5/10/26</a:t>
             </a:fld>
             <a:endParaRPr lang="en-US" dirty="0"/>
           </a:p>
@@ -14651,13 +14651,13 @@
   <p:clrMapOvr>
     <a:overrideClrMapping bg1="lt1" tx1="dk1" bg2="lt2" tx2="dk2" accent1="accent1" accent2="accent2" accent3="accent3" accent4="accent4" accent5="accent5" accent6="accent6" hlink="hlink" folHlink="folHlink"/>
   </p:clrMapOvr>
-  <mc:AlternateContent xmlns:mc="http://schemas.openxmlformats.org/markup-compatibility/2006">
-    <mc:Choice xmlns:p14="http://schemas.microsoft.com/office/powerpoint/2010/main" Requires="p14">
+  <mc:AlternateContent xmlns:mc="http://schemas.openxmlformats.org/markup-compatibility/2006" xmlns:p14="http://schemas.microsoft.com/office/powerpoint/2010/main">
+    <mc:Choice Requires="p14">
       <p:transition spd="slow" p14:dur="1600">
         <p14:gallery dir="l"/>
       </p:transition>
     </mc:Choice>
-    <mc:Fallback>
+    <mc:Fallback xmlns="">
       <p:transition spd="slow">
         <p:fade/>
       </p:transition>
@@ -14799,7 +14799,7 @@
           <a:p>
             <a:fld id="{B19110DB-B309-8C4D-B2B7-2B6318BF3864}" type="datetime1">
               <a:rPr lang="en-US" smtClean="0"/>
-              <a:t>5/10/2026</a:t>
+              <a:t>5/10/26</a:t>
             </a:fld>
             <a:endParaRPr lang="en-US" dirty="0"/>
           </a:p>
@@ -14932,13 +14932,13 @@
   <p:clrMapOvr>
     <a:masterClrMapping/>
   </p:clrMapOvr>
-  <mc:AlternateContent xmlns:mc="http://schemas.openxmlformats.org/markup-compatibility/2006">
-    <mc:Choice xmlns:p14="http://schemas.microsoft.com/office/powerpoint/2010/main" Requires="p14">
+  <mc:AlternateContent xmlns:mc="http://schemas.openxmlformats.org/markup-compatibility/2006" xmlns:p14="http://schemas.microsoft.com/office/powerpoint/2010/main">
+    <mc:Choice Requires="p14">
       <p:transition spd="slow" p14:dur="1600">
         <p14:gallery dir="l"/>
       </p:transition>
     </mc:Choice>
-    <mc:Fallback>
+    <mc:Fallback xmlns="">
       <p:transition spd="slow">
         <p:fade/>
       </p:transition>
@@ -15080,7 +15080,7 @@
           <a:p>
             <a:fld id="{FCCD263F-17D1-DD49-AE75-3B385E0CFFA9}" type="datetime1">
               <a:rPr lang="en-US" smtClean="0"/>
-              <a:t>5/10/2026</a:t>
+              <a:t>5/10/26</a:t>
             </a:fld>
             <a:endParaRPr lang="en-US" dirty="0"/>
           </a:p>
@@ -15213,13 +15213,13 @@
   <p:clrMapOvr>
     <a:masterClrMapping/>
   </p:clrMapOvr>
-  <mc:AlternateContent xmlns:mc="http://schemas.openxmlformats.org/markup-compatibility/2006">
-    <mc:Choice xmlns:p14="http://schemas.microsoft.com/office/powerpoint/2010/main" Requires="p14">
+  <mc:AlternateContent xmlns:mc="http://schemas.openxmlformats.org/markup-compatibility/2006" xmlns:p14="http://schemas.microsoft.com/office/powerpoint/2010/main">
+    <mc:Choice Requires="p14">
       <p:transition spd="slow" p14:dur="1600">
         <p14:gallery dir="l"/>
       </p:transition>
     </mc:Choice>
-    <mc:Fallback>
+    <mc:Fallback xmlns="">
       <p:transition spd="slow">
         <p:fade/>
       </p:transition>
@@ -15361,7 +15361,7 @@
           <a:p>
             <a:fld id="{1664374B-BFF6-3C4D-A435-E85D19EC7285}" type="datetime1">
               <a:rPr lang="en-US" smtClean="0"/>
-              <a:t>5/10/2026</a:t>
+              <a:t>5/10/26</a:t>
             </a:fld>
             <a:endParaRPr lang="en-US" dirty="0"/>
           </a:p>
@@ -15494,13 +15494,13 @@
   <p:clrMapOvr>
     <a:masterClrMapping/>
   </p:clrMapOvr>
-  <mc:AlternateContent xmlns:mc="http://schemas.openxmlformats.org/markup-compatibility/2006">
-    <mc:Choice xmlns:p14="http://schemas.microsoft.com/office/powerpoint/2010/main" Requires="p14">
+  <mc:AlternateContent xmlns:mc="http://schemas.openxmlformats.org/markup-compatibility/2006" xmlns:p14="http://schemas.microsoft.com/office/powerpoint/2010/main">
+    <mc:Choice Requires="p14">
       <p:transition spd="slow" p14:dur="1600">
         <p14:gallery dir="l"/>
       </p:transition>
     </mc:Choice>
-    <mc:Fallback>
+    <mc:Fallback xmlns="">
       <p:transition spd="slow">
         <p:fade/>
       </p:transition>
@@ -15585,7 +15585,7 @@
           <a:p>
             <a:fld id="{E9C4FF47-482A-5A42-BC2B-D17760A60D7C}" type="datetime1">
               <a:rPr lang="en-US" smtClean="0"/>
-              <a:t>5/10/2026</a:t>
+              <a:t>5/10/26</a:t>
             </a:fld>
             <a:endParaRPr lang="en-US"/>
           </a:p>
@@ -15874,13 +15874,13 @@
   <p:clrMapOvr>
     <a:masterClrMapping/>
   </p:clrMapOvr>
-  <mc:AlternateContent xmlns:mc="http://schemas.openxmlformats.org/markup-compatibility/2006">
-    <mc:Choice xmlns:p14="http://schemas.microsoft.com/office/powerpoint/2010/main" Requires="p14">
+  <mc:AlternateContent xmlns:mc="http://schemas.openxmlformats.org/markup-compatibility/2006" xmlns:p14="http://schemas.microsoft.com/office/powerpoint/2010/main">
+    <mc:Choice Requires="p14">
       <p:transition spd="slow" p14:dur="1600">
         <p14:gallery dir="l"/>
       </p:transition>
     </mc:Choice>
-    <mc:Fallback>
+    <mc:Fallback xmlns="">
       <p:transition spd="slow">
         <p:fade/>
       </p:transition>
@@ -15965,7 +15965,7 @@
           <a:p>
             <a:fld id="{A0E0A138-5AFC-9A4D-A014-96125C4D80CC}" type="datetime1">
               <a:rPr lang="en-US" smtClean="0"/>
-              <a:t>5/10/2026</a:t>
+              <a:t>5/10/26</a:t>
             </a:fld>
             <a:endParaRPr lang="en-US"/>
           </a:p>
@@ -16406,13 +16406,13 @@
   <p:clrMapOvr>
     <a:masterClrMapping/>
   </p:clrMapOvr>
-  <mc:AlternateContent xmlns:mc="http://schemas.openxmlformats.org/markup-compatibility/2006">
-    <mc:Choice xmlns:p14="http://schemas.microsoft.com/office/powerpoint/2010/main" Requires="p14">
+  <mc:AlternateContent xmlns:mc="http://schemas.openxmlformats.org/markup-compatibility/2006" xmlns:p14="http://schemas.microsoft.com/office/powerpoint/2010/main">
+    <mc:Choice Requires="p14">
       <p:transition spd="slow" p14:dur="1600">
         <p14:gallery dir="l"/>
       </p:transition>
     </mc:Choice>
-    <mc:Fallback>
+    <mc:Fallback xmlns="">
       <p:transition spd="slow">
         <p:fade/>
       </p:transition>
@@ -16497,7 +16497,7 @@
           <a:p>
             <a:fld id="{23BF1EA9-87CF-8343-9776-D1D52A179B2E}" type="datetime1">
               <a:rPr lang="en-US" smtClean="0"/>
-              <a:t>5/10/2026</a:t>
+              <a:t>5/10/26</a:t>
             </a:fld>
             <a:endParaRPr lang="en-US"/>
           </a:p>
@@ -16570,13 +16570,13 @@
   <p:clrMapOvr>
     <a:masterClrMapping/>
   </p:clrMapOvr>
-  <mc:AlternateContent xmlns:mc="http://schemas.openxmlformats.org/markup-compatibility/2006">
-    <mc:Choice xmlns:p14="http://schemas.microsoft.com/office/powerpoint/2010/main" Requires="p14">
+  <mc:AlternateContent xmlns:mc="http://schemas.openxmlformats.org/markup-compatibility/2006" xmlns:p14="http://schemas.microsoft.com/office/powerpoint/2010/main">
+    <mc:Choice Requires="p14">
       <p:transition spd="slow" p14:dur="1600">
         <p14:gallery dir="l"/>
       </p:transition>
     </mc:Choice>
-    <mc:Fallback>
+    <mc:Fallback xmlns="">
       <p:transition spd="slow">
         <p:fade/>
       </p:transition>
@@ -16625,7 +16625,7 @@
           <a:p>
             <a:fld id="{A889506F-D76B-DF43-A96B-B8A73BD734D5}" type="datetime1">
               <a:rPr lang="en-US" smtClean="0"/>
-              <a:t>5/10/2026</a:t>
+              <a:t>5/10/26</a:t>
             </a:fld>
             <a:endParaRPr lang="en-US"/>
           </a:p>
@@ -16698,13 +16698,13 @@
   <p:clrMapOvr>
     <a:masterClrMapping/>
   </p:clrMapOvr>
-  <mc:AlternateContent xmlns:mc="http://schemas.openxmlformats.org/markup-compatibility/2006">
-    <mc:Choice xmlns:p14="http://schemas.microsoft.com/office/powerpoint/2010/main" Requires="p14">
+  <mc:AlternateContent xmlns:mc="http://schemas.openxmlformats.org/markup-compatibility/2006" xmlns:p14="http://schemas.microsoft.com/office/powerpoint/2010/main">
+    <mc:Choice Requires="p14">
       <p:transition spd="slow" p14:dur="1600">
         <p14:gallery dir="l"/>
       </p:transition>
     </mc:Choice>
-    <mc:Fallback>
+    <mc:Fallback xmlns="">
       <p:transition spd="slow">
         <p:fade/>
       </p:transition>
@@ -16964,7 +16964,7 @@
           <a:p>
             <a:fld id="{3DCB9363-2EBD-E747-A181-1D3A08C65245}" type="datetime1">
               <a:rPr lang="en-US" smtClean="0"/>
-              <a:t>5/10/2026</a:t>
+              <a:t>5/10/26</a:t>
             </a:fld>
             <a:endParaRPr lang="en-US"/>
           </a:p>
@@ -17141,13 +17141,13 @@
   <p:clrMapOvr>
     <a:masterClrMapping/>
   </p:clrMapOvr>
-  <mc:AlternateContent xmlns:mc="http://schemas.openxmlformats.org/markup-compatibility/2006">
-    <mc:Choice xmlns:p14="http://schemas.microsoft.com/office/powerpoint/2010/main" Requires="p14">
+  <mc:AlternateContent xmlns:mc="http://schemas.openxmlformats.org/markup-compatibility/2006" xmlns:p14="http://schemas.microsoft.com/office/powerpoint/2010/main">
+    <mc:Choice Requires="p14">
       <p:transition spd="slow" p14:dur="1600">
         <p14:gallery dir="l"/>
       </p:transition>
     </mc:Choice>
-    <mc:Fallback>
+    <mc:Fallback xmlns="">
       <p:transition spd="slow">
         <p:fade/>
       </p:transition>
@@ -17287,7 +17287,7 @@
           <a:p>
             <a:fld id="{B2777B30-84C4-E14A-AD9D-99C744B58D2B}" type="datetime1">
               <a:rPr lang="en-US" smtClean="0"/>
-              <a:t>5/10/2026</a:t>
+              <a:t>5/10/26</a:t>
             </a:fld>
             <a:endParaRPr lang="en-US"/>
           </a:p>
@@ -17534,13 +17534,13 @@
   <p:clrMapOvr>
     <a:masterClrMapping/>
   </p:clrMapOvr>
-  <mc:AlternateContent xmlns:mc="http://schemas.openxmlformats.org/markup-compatibility/2006">
-    <mc:Choice xmlns:p14="http://schemas.microsoft.com/office/powerpoint/2010/main" Requires="p14">
+  <mc:AlternateContent xmlns:mc="http://schemas.openxmlformats.org/markup-compatibility/2006" xmlns:p14="http://schemas.microsoft.com/office/powerpoint/2010/main">
+    <mc:Choice Requires="p14">
       <p:transition spd="slow" p14:dur="1600">
         <p14:gallery dir="l"/>
       </p:transition>
     </mc:Choice>
-    <mc:Fallback>
+    <mc:Fallback xmlns="">
       <p:transition spd="slow">
         <p:fade/>
       </p:transition>
@@ -17740,7 +17740,7 @@
           <a:p>
             <a:fld id="{DAB2B00D-D41F-AF4D-9311-8F7464F57478}" type="datetime1">
               <a:rPr lang="en-US" smtClean="0"/>
-              <a:t>5/10/2026</a:t>
+              <a:t>5/10/26</a:t>
             </a:fld>
             <a:endParaRPr lang="en-US"/>
           </a:p>
@@ -17975,13 +17975,13 @@
   <p:clrMapOvr>
     <a:masterClrMapping/>
   </p:clrMapOvr>
-  <mc:AlternateContent xmlns:mc="http://schemas.openxmlformats.org/markup-compatibility/2006">
-    <mc:Choice xmlns:p14="http://schemas.microsoft.com/office/powerpoint/2010/main" Requires="p14">
+  <mc:AlternateContent xmlns:mc="http://schemas.openxmlformats.org/markup-compatibility/2006" xmlns:p14="http://schemas.microsoft.com/office/powerpoint/2010/main">
+    <mc:Choice Requires="p14">
       <p:transition spd="slow" p14:dur="1600">
         <p14:gallery dir="l"/>
       </p:transition>
     </mc:Choice>
-    <mc:Fallback>
+    <mc:Fallback xmlns="">
       <p:transition spd="slow">
         <p:fade/>
       </p:transition>
@@ -18116,7 +18116,7 @@
           <a:p>
             <a:fld id="{FED1D72C-8184-5840-B481-389540A01A17}" type="datetime1">
               <a:rPr lang="en-US" smtClean="0"/>
-              <a:t>5/10/2026</a:t>
+              <a:t>5/10/26</a:t>
             </a:fld>
             <a:endParaRPr lang="en-US"/>
           </a:p>
@@ -18322,13 +18322,13 @@
   <p:clrMapOvr>
     <a:overrideClrMapping bg1="lt1" tx1="dk1" bg2="lt2" tx2="dk2" accent1="accent1" accent2="accent2" accent3="accent3" accent4="accent4" accent5="accent5" accent6="accent6" hlink="hlink" folHlink="folHlink"/>
   </p:clrMapOvr>
-  <mc:AlternateContent xmlns:mc="http://schemas.openxmlformats.org/markup-compatibility/2006">
-    <mc:Choice xmlns:p14="http://schemas.microsoft.com/office/powerpoint/2010/main" Requires="p14">
+  <mc:AlternateContent xmlns:mc="http://schemas.openxmlformats.org/markup-compatibility/2006" xmlns:p14="http://schemas.microsoft.com/office/powerpoint/2010/main">
+    <mc:Choice Requires="p14">
       <p:transition spd="slow" p14:dur="1600">
         <p14:gallery dir="l"/>
       </p:transition>
     </mc:Choice>
-    <mc:Fallback>
+    <mc:Fallback xmlns="">
       <p:transition spd="slow">
         <p:fade/>
       </p:transition>
@@ -18459,7 +18459,7 @@
           <a:p>
             <a:fld id="{FB32C1FE-0BA1-514C-8495-D43A7528783D}" type="datetime1">
               <a:rPr lang="en-US" smtClean="0"/>
-              <a:t>5/10/2026</a:t>
+              <a:t>5/10/26</a:t>
             </a:fld>
             <a:endParaRPr lang="en-US"/>
           </a:p>
@@ -18647,13 +18647,13 @@
   <p:clrMapOvr>
     <a:overrideClrMapping bg1="lt1" tx1="dk1" bg2="lt2" tx2="dk2" accent1="accent1" accent2="accent2" accent3="accent3" accent4="accent4" accent5="accent5" accent6="accent6" hlink="hlink" folHlink="folHlink"/>
   </p:clrMapOvr>
-  <mc:AlternateContent xmlns:mc="http://schemas.openxmlformats.org/markup-compatibility/2006">
-    <mc:Choice xmlns:p14="http://schemas.microsoft.com/office/powerpoint/2010/main" Requires="p14">
+  <mc:AlternateContent xmlns:mc="http://schemas.openxmlformats.org/markup-compatibility/2006" xmlns:p14="http://schemas.microsoft.com/office/powerpoint/2010/main">
+    <mc:Choice Requires="p14">
       <p:transition spd="slow" p14:dur="1600">
         <p14:gallery dir="l"/>
       </p:transition>
     </mc:Choice>
-    <mc:Fallback>
+    <mc:Fallback xmlns="">
       <p:transition spd="slow">
         <p:fade/>
       </p:transition>
@@ -18826,7 +18826,7 @@
           <a:p>
             <a:fld id="{A43625EB-9CE7-FE4A-962B-ADA6590F06B0}" type="datetime1">
               <a:rPr lang="en-US" smtClean="0"/>
-              <a:t>5/10/2026</a:t>
+              <a:t>5/10/26</a:t>
             </a:fld>
             <a:endParaRPr lang="en-US"/>
           </a:p>
@@ -18909,13 +18909,13 @@
   <p:clrMapOvr>
     <a:masterClrMapping/>
   </p:clrMapOvr>
-  <mc:AlternateContent xmlns:mc="http://schemas.openxmlformats.org/markup-compatibility/2006">
-    <mc:Choice xmlns:p14="http://schemas.microsoft.com/office/powerpoint/2010/main" Requires="p14">
+  <mc:AlternateContent xmlns:mc="http://schemas.openxmlformats.org/markup-compatibility/2006" xmlns:p14="http://schemas.microsoft.com/office/powerpoint/2010/main">
+    <mc:Choice Requires="p14">
       <p:transition spd="slow" p14:dur="1600">
         <p14:gallery dir="l"/>
       </p:transition>
     </mc:Choice>
-    <mc:Fallback>
+    <mc:Fallback xmlns="">
       <p:transition spd="slow">
         <p:fade/>
       </p:transition>
@@ -19135,7 +19135,7 @@
           <a:p>
             <a:fld id="{88E0F305-9E38-2F43-A154-0A13A54C557F}" type="datetime1">
               <a:rPr lang="en-US" smtClean="0"/>
-              <a:t>5/10/2026</a:t>
+              <a:t>5/10/26</a:t>
             </a:fld>
             <a:endParaRPr lang="en-US"/>
           </a:p>
@@ -19208,13 +19208,13 @@
   <p:clrMapOvr>
     <a:masterClrMapping/>
   </p:clrMapOvr>
-  <mc:AlternateContent xmlns:mc="http://schemas.openxmlformats.org/markup-compatibility/2006">
-    <mc:Choice xmlns:p14="http://schemas.microsoft.com/office/powerpoint/2010/main" Requires="p14">
+  <mc:AlternateContent xmlns:mc="http://schemas.openxmlformats.org/markup-compatibility/2006" xmlns:p14="http://schemas.microsoft.com/office/powerpoint/2010/main">
+    <mc:Choice Requires="p14">
       <p:transition spd="slow" p14:dur="1600">
         <p14:gallery dir="l"/>
       </p:transition>
     </mc:Choice>
-    <mc:Fallback>
+    <mc:Fallback xmlns="">
       <p:transition spd="slow">
         <p:fade/>
       </p:transition>
@@ -19429,7 +19429,7 @@
           <a:p>
             <a:fld id="{B9258CAE-C0F2-B346-BD4B-417B70F2F6EB}" type="datetime1">
               <a:rPr lang="en-US" smtClean="0"/>
-              <a:t>5/10/2026</a:t>
+              <a:t>5/10/26</a:t>
             </a:fld>
             <a:endParaRPr lang="en-US"/>
           </a:p>
@@ -19502,13 +19502,13 @@
   <p:clrMapOvr>
     <a:masterClrMapping/>
   </p:clrMapOvr>
-  <mc:AlternateContent xmlns:mc="http://schemas.openxmlformats.org/markup-compatibility/2006">
-    <mc:Choice xmlns:p14="http://schemas.microsoft.com/office/powerpoint/2010/main" Requires="p14">
+  <mc:AlternateContent xmlns:mc="http://schemas.openxmlformats.org/markup-compatibility/2006" xmlns:p14="http://schemas.microsoft.com/office/powerpoint/2010/main">
+    <mc:Choice Requires="p14">
       <p:transition spd="slow" p14:dur="1600">
         <p14:gallery dir="l"/>
       </p:transition>
     </mc:Choice>
-    <mc:Fallback>
+    <mc:Fallback xmlns="">
       <p:transition spd="slow">
         <p:fade/>
       </p:transition>
@@ -19704,7 +19704,7 @@
           <a:p>
             <a:fld id="{51EF5BDB-72C5-6C45-B365-DB2A3AA7E4EB}" type="datetime1">
               <a:rPr lang="en-US" smtClean="0"/>
-              <a:t>5/10/2026</a:t>
+              <a:t>5/10/26</a:t>
             </a:fld>
             <a:endParaRPr lang="en-US"/>
           </a:p>
@@ -19787,13 +19787,13 @@
   <p:clrMapOvr>
     <a:overrideClrMapping bg1="lt1" tx1="dk1" bg2="lt2" tx2="dk2" accent1="accent1" accent2="accent2" accent3="accent3" accent4="accent4" accent5="accent5" accent6="accent6" hlink="hlink" folHlink="folHlink"/>
   </p:clrMapOvr>
-  <mc:AlternateContent xmlns:mc="http://schemas.openxmlformats.org/markup-compatibility/2006">
-    <mc:Choice xmlns:p14="http://schemas.microsoft.com/office/powerpoint/2010/main" Requires="p14">
+  <mc:AlternateContent xmlns:mc="http://schemas.openxmlformats.org/markup-compatibility/2006" xmlns:p14="http://schemas.microsoft.com/office/powerpoint/2010/main">
+    <mc:Choice Requires="p14">
       <p:transition spd="slow" p14:dur="1600">
         <p14:gallery dir="l"/>
       </p:transition>
     </mc:Choice>
-    <mc:Fallback>
+    <mc:Fallback xmlns="">
       <p:transition spd="slow">
         <p:fade/>
       </p:transition>
@@ -19989,7 +19989,7 @@
             <a:fld id="{ABF82D58-E94F-DA46-9A9B-DBAB917AB2DD}" type="datetime1">
               <a:rPr lang="en-US" smtClean="0"/>
               <a:pPr/>
-              <a:t>5/10/2026</a:t>
+              <a:t>5/10/26</a:t>
             </a:fld>
             <a:endParaRPr lang="en-US" dirty="0"/>
           </a:p>
@@ -20150,13 +20150,13 @@
     <p:sldLayoutId id="2147484031" r:id="rId52"/>
     <p:sldLayoutId id="2147484032" r:id="rId53"/>
   </p:sldLayoutIdLst>
-  <mc:AlternateContent xmlns:mc="http://schemas.openxmlformats.org/markup-compatibility/2006">
-    <mc:Choice xmlns:p14="http://schemas.microsoft.com/office/powerpoint/2010/main" Requires="p14">
+  <mc:AlternateContent xmlns:mc="http://schemas.openxmlformats.org/markup-compatibility/2006" xmlns:p14="http://schemas.microsoft.com/office/powerpoint/2010/main">
+    <mc:Choice Requires="p14">
       <p:transition spd="slow" p14:dur="1600">
         <p14:gallery dir="l"/>
       </p:transition>
     </mc:Choice>
-    <mc:Fallback>
+    <mc:Fallback xmlns="">
       <p:transition spd="slow">
         <p:fade/>
       </p:transition>
@@ -20653,13 +20653,13 @@
   <p:clrMapOvr>
     <a:masterClrMapping/>
   </p:clrMapOvr>
-  <mc:AlternateContent xmlns:mc="http://schemas.openxmlformats.org/markup-compatibility/2006">
-    <mc:Choice xmlns:p14="http://schemas.microsoft.com/office/powerpoint/2010/main" Requires="p14">
+  <mc:AlternateContent xmlns:mc="http://schemas.openxmlformats.org/markup-compatibility/2006" xmlns:p14="http://schemas.microsoft.com/office/powerpoint/2010/main">
+    <mc:Choice Requires="p14">
       <p:transition spd="slow" p14:dur="1600">
         <p14:gallery dir="l"/>
       </p:transition>
     </mc:Choice>
-    <mc:Fallback>
+    <mc:Fallback xmlns="">
       <p:transition spd="slow">
         <p:fade/>
       </p:transition>
@@ -20832,13 +20832,13 @@
   <p:clrMapOvr>
     <a:masterClrMapping/>
   </p:clrMapOvr>
-  <mc:AlternateContent xmlns:mc="http://schemas.openxmlformats.org/markup-compatibility/2006">
-    <mc:Choice xmlns:p14="http://schemas.microsoft.com/office/powerpoint/2010/main" Requires="p14">
+  <mc:AlternateContent xmlns:mc="http://schemas.openxmlformats.org/markup-compatibility/2006" xmlns:p14="http://schemas.microsoft.com/office/powerpoint/2010/main">
+    <mc:Choice Requires="p14">
       <p:transition spd="slow" p14:dur="1600">
         <p14:gallery dir="l"/>
       </p:transition>
     </mc:Choice>
-    <mc:Fallback>
+    <mc:Fallback xmlns="">
       <p:transition spd="slow">
         <p:fade/>
       </p:transition>
@@ -21030,13 +21030,13 @@
   <p:clrMapOvr>
     <a:masterClrMapping/>
   </p:clrMapOvr>
-  <mc:AlternateContent xmlns:mc="http://schemas.openxmlformats.org/markup-compatibility/2006">
-    <mc:Choice xmlns:p14="http://schemas.microsoft.com/office/powerpoint/2010/main" Requires="p14">
+  <mc:AlternateContent xmlns:mc="http://schemas.openxmlformats.org/markup-compatibility/2006" xmlns:p14="http://schemas.microsoft.com/office/powerpoint/2010/main">
+    <mc:Choice Requires="p14">
       <p:transition spd="slow" p14:dur="1600">
         <p14:gallery dir="l"/>
       </p:transition>
     </mc:Choice>
-    <mc:Fallback>
+    <mc:Fallback xmlns="">
       <p:transition spd="slow">
         <p:fade/>
       </p:transition>
@@ -21212,13 +21212,13 @@
   <p:clrMapOvr>
     <a:masterClrMapping/>
   </p:clrMapOvr>
-  <mc:AlternateContent xmlns:mc="http://schemas.openxmlformats.org/markup-compatibility/2006">
-    <mc:Choice xmlns:p14="http://schemas.microsoft.com/office/powerpoint/2010/main" Requires="p14">
+  <mc:AlternateContent xmlns:mc="http://schemas.openxmlformats.org/markup-compatibility/2006" xmlns:p14="http://schemas.microsoft.com/office/powerpoint/2010/main">
+    <mc:Choice Requires="p14">
       <p:transition spd="slow" p14:dur="1600">
         <p14:gallery dir="l"/>
       </p:transition>
     </mc:Choice>
-    <mc:Fallback>
+    <mc:Fallback xmlns="">
       <p:transition spd="slow">
         <p:fade/>
       </p:transition>
@@ -21363,13 +21363,13 @@
   <p:clrMapOvr>
     <a:masterClrMapping/>
   </p:clrMapOvr>
-  <mc:AlternateContent xmlns:mc="http://schemas.openxmlformats.org/markup-compatibility/2006">
-    <mc:Choice xmlns:p14="http://schemas.microsoft.com/office/powerpoint/2010/main" Requires="p14">
+  <mc:AlternateContent xmlns:mc="http://schemas.openxmlformats.org/markup-compatibility/2006" xmlns:p14="http://schemas.microsoft.com/office/powerpoint/2010/main">
+    <mc:Choice Requires="p14">
       <p:transition spd="slow" p14:dur="1600">
         <p14:gallery dir="l"/>
       </p:transition>
     </mc:Choice>
-    <mc:Fallback>
+    <mc:Fallback xmlns="">
       <p:transition spd="slow">
         <p:fade/>
       </p:transition>
@@ -21599,13 +21599,13 @@
   <p:clrMapOvr>
     <a:masterClrMapping/>
   </p:clrMapOvr>
-  <mc:AlternateContent xmlns:mc="http://schemas.openxmlformats.org/markup-compatibility/2006">
-    <mc:Choice xmlns:p14="http://schemas.microsoft.com/office/powerpoint/2010/main" Requires="p14">
+  <mc:AlternateContent xmlns:mc="http://schemas.openxmlformats.org/markup-compatibility/2006" xmlns:p14="http://schemas.microsoft.com/office/powerpoint/2010/main">
+    <mc:Choice Requires="p14">
       <p:transition spd="slow" p14:dur="1600">
         <p14:gallery dir="l"/>
       </p:transition>
     </mc:Choice>
-    <mc:Fallback>
+    <mc:Fallback xmlns="">
       <p:transition spd="slow">
         <p:fade/>
       </p:transition>
@@ -21707,53 +21707,43 @@
               <a:buChar char="•"/>
             </a:pPr>
             <a:r>
-              <a:rPr lang="en-GB" sz="2000">
+              <a:rPr lang="en-GB" sz="2000" dirty="0">
                 <a:ea typeface="+mn-lt"/>
                 <a:cs typeface="+mn-lt"/>
               </a:rPr>
-              <a:t>Grading</a:t>
-            </a:r>
-            <a:endParaRPr lang="en-US" sz="2000">
+              <a:t>Grading/Flaming/Advising</a:t>
+            </a:r>
+            <a:endParaRPr lang="en-US" sz="2000" dirty="0">
               <a:ea typeface="+mn-lt"/>
               <a:cs typeface="+mn-lt"/>
             </a:endParaRPr>
           </a:p>
           <a:p>
             <a:r>
-              <a:rPr lang="en-GB" sz="2000">
+              <a:rPr lang="en-GB" sz="2000" dirty="0">
                 <a:ea typeface="+mn-lt"/>
                 <a:cs typeface="+mn-lt"/>
               </a:rPr>
-              <a:t>    It grades out of scale from 100 using Gemini 2.5 Flash while considers their chosen industry , and </a:t>
-            </a:r>
-            <a:endParaRPr lang="en-GB">
-              <a:ea typeface="+mn-lt"/>
-              <a:cs typeface="+mn-lt"/>
-            </a:endParaRPr>
-          </a:p>
-          <a:p>
-            <a:r>
-              <a:rPr lang="en-GB" sz="2000">
+              <a:t>   Our project grades the cv uploaded on scale from 1 to 100 using Gemini 2.5 Flash.</a:t>
+            </a:r>
+          </a:p>
+          <a:p>
+            <a:r>
+              <a:rPr lang="en-GB" sz="2000" dirty="0">
                 <a:ea typeface="+mn-lt"/>
                 <a:cs typeface="+mn-lt"/>
               </a:rPr>
-              <a:t>    tailors feedback accordingly. </a:t>
-            </a:r>
-            <a:r>
-              <a:rPr lang="en-GB" sz="2000"/>
-              <a:t>This system was implemented to give the user the best advice specific to</a:t>
-            </a:r>
-            <a:endParaRPr lang="en-GB"/>
-          </a:p>
-          <a:p>
-            <a:r>
-              <a:rPr lang="en-GB" sz="2000"/>
-              <a:t>    their CV. </a:t>
-            </a:r>
-            <a:endParaRPr lang="en-GB">
-              <a:ea typeface="+mn-lt"/>
-              <a:cs typeface="+mn-lt"/>
-            </a:endParaRPr>
+              <a:t>    It also then roasts the user but then also provides constructive feedback.</a:t>
+            </a:r>
+          </a:p>
+          <a:p>
+            <a:r>
+              <a:rPr lang="en-GB" sz="2000" dirty="0">
+                <a:ea typeface="+mn-lt"/>
+                <a:cs typeface="+mn-lt"/>
+              </a:rPr>
+              <a:t>    It takes into account the Industry they selected on the first page to give them specific, tailored advice. </a:t>
+            </a:r>
           </a:p>
           <a:p>
             <a:endParaRPr lang="en-GB" sz="2000" dirty="0">
@@ -21767,36 +21757,64 @@
               <a:buChar char="•"/>
             </a:pPr>
             <a:r>
-              <a:rPr lang="en-GB" sz="2000">
+              <a:rPr lang="en-GB" sz="2000" dirty="0">
                 <a:ea typeface="+mn-lt"/>
                 <a:cs typeface="+mn-lt"/>
               </a:rPr>
-              <a:t>DARK MODE! (just for bailey)</a:t>
-            </a:r>
-            <a:endParaRPr lang="en-GB"/>
-          </a:p>
-          <a:p>
-            <a:r>
-              <a:rPr lang="en-GB" sz="2000">
+              <a:t>Voice</a:t>
+            </a:r>
+          </a:p>
+          <a:p>
+            <a:r>
+              <a:rPr lang="en-GB" sz="2000" dirty="0">
                 <a:ea typeface="+mn-lt"/>
                 <a:cs typeface="+mn-lt"/>
               </a:rPr>
-              <a:t>    This improves the user’s experience as it helps reduce blue light production and eye strain or just</a:t>
-            </a:r>
-            <a:endParaRPr lang="en-GB" dirty="0">
+              <a:t>     We also feed Gemini’s output to </a:t>
+            </a:r>
+            <a:r>
+              <a:rPr lang="en-GB" sz="2000" dirty="0" err="1">
+                <a:ea typeface="+mn-lt"/>
+                <a:cs typeface="+mn-lt"/>
+              </a:rPr>
+              <a:t>ElevenLabs</a:t>
+            </a:r>
+            <a:r>
+              <a:rPr lang="en-GB" sz="2000" dirty="0">
+                <a:ea typeface="+mn-lt"/>
+                <a:cs typeface="+mn-lt"/>
+              </a:rPr>
+              <a:t> TTS to allow for a better quality of life for the user, and to </a:t>
+            </a:r>
+          </a:p>
+          <a:p>
+            <a:r>
+              <a:rPr lang="en-GB" sz="2000" dirty="0">
+                <a:ea typeface="+mn-lt"/>
+                <a:cs typeface="+mn-lt"/>
+              </a:rPr>
+              <a:t>      provide accessibility options for the user. And to maximise mental health damage</a:t>
+            </a:r>
+            <a:r>
+              <a:rPr lang="en-US" sz="2000" dirty="0"/>
+              <a:t>.</a:t>
+            </a:r>
+            <a:endParaRPr lang="en-GB" sz="2000" dirty="0">
               <a:ea typeface="+mn-lt"/>
               <a:cs typeface="+mn-lt"/>
             </a:endParaRPr>
           </a:p>
           <a:p>
-            <a:r>
-              <a:rPr lang="en-GB" sz="2000">
-                <a:ea typeface="+mn-lt"/>
-                <a:cs typeface="+mn-lt"/>
-              </a:rPr>
-              <a:t>    simply for preference. </a:t>
-            </a:r>
-            <a:endParaRPr lang="en-GB"/>
+            <a:endParaRPr lang="en-GB" sz="2000" dirty="0">
+              <a:ea typeface="+mn-lt"/>
+              <a:cs typeface="+mn-lt"/>
+            </a:endParaRPr>
+          </a:p>
+          <a:p>
+            <a:endParaRPr lang="en-GB" sz="2000" dirty="0">
+              <a:ea typeface="+mn-lt"/>
+              <a:cs typeface="+mn-lt"/>
+            </a:endParaRPr>
           </a:p>
           <a:p>
             <a:endParaRPr lang="en-GB" sz="2000" dirty="0"/>
@@ -21816,13 +21834,13 @@
   <p:clrMapOvr>
     <a:masterClrMapping/>
   </p:clrMapOvr>
-  <mc:AlternateContent xmlns:mc="http://schemas.openxmlformats.org/markup-compatibility/2006">
-    <mc:Choice xmlns:p14="http://schemas.microsoft.com/office/powerpoint/2010/main" Requires="p14">
+  <mc:AlternateContent xmlns:mc="http://schemas.openxmlformats.org/markup-compatibility/2006" xmlns:p14="http://schemas.microsoft.com/office/powerpoint/2010/main">
+    <mc:Choice Requires="p14">
       <p:transition spd="slow" p14:dur="1600">
         <p14:gallery dir="l"/>
       </p:transition>
     </mc:Choice>
-    <mc:Fallback>
+    <mc:Fallback xmlns="">
       <p:transition spd="slow">
         <p:fade/>
       </p:transition>
@@ -21911,62 +21929,6 @@
           </a:bodyPr>
           <a:lstStyle/>
           <a:p>
-            <a:pPr marL="285750" indent="-285750">
-              <a:buFont typeface="Arial"/>
-              <a:buChar char="•"/>
-            </a:pPr>
-            <a:r>
-              <a:rPr lang="en-GB" sz="2000">
-                <a:ea typeface="+mn-lt"/>
-                <a:cs typeface="+mn-lt"/>
-              </a:rPr>
-              <a:t>Voice</a:t>
-            </a:r>
-            <a:endParaRPr lang="en-US" sz="2000"/>
-          </a:p>
-          <a:p>
-            <a:r>
-              <a:rPr lang="en-GB" sz="2000" dirty="0">
-                <a:ea typeface="+mn-lt"/>
-                <a:cs typeface="+mn-lt"/>
-              </a:rPr>
-              <a:t>     Feeding the output from the grading agent as a base to Gemini 2.5 Flash, to create a </a:t>
-            </a:r>
-            <a:r>
-              <a:rPr lang="en-GB" sz="2000">
-                <a:ea typeface="+mn-lt"/>
-                <a:cs typeface="+mn-lt"/>
-              </a:rPr>
-              <a:t>roast. </a:t>
-            </a:r>
-          </a:p>
-          <a:p>
-            <a:r>
-              <a:rPr lang="en-GB" sz="2000">
-                <a:ea typeface="+mn-lt"/>
-                <a:cs typeface="+mn-lt"/>
-              </a:rPr>
-              <a:t>     Eleven labs then incorporates to provide an immersive audio </a:t>
-            </a:r>
-            <a:r>
-              <a:rPr lang="en-GB" sz="2000" dirty="0">
-                <a:ea typeface="+mn-lt"/>
-                <a:cs typeface="+mn-lt"/>
-              </a:rPr>
-              <a:t>experience. This was added to</a:t>
-            </a:r>
-          </a:p>
-          <a:p>
-            <a:r>
-              <a:rPr lang="en-GB" sz="2000" dirty="0">
-                <a:ea typeface="+mn-lt"/>
-                <a:cs typeface="+mn-lt"/>
-              </a:rPr>
-              <a:t>     allow for a better user experience, accessibility and damage to mental health (in a good way :D)</a:t>
-            </a:r>
-            <a:endParaRPr lang="en-GB" sz="2000"/>
-          </a:p>
-          <a:p>
             <a:endParaRPr lang="en-GB" sz="2000" dirty="0">
               <a:ea typeface="+mn-lt"/>
               <a:cs typeface="+mn-lt"/>
@@ -21984,7 +21946,7 @@
               </a:rPr>
               <a:t>Vultr</a:t>
             </a:r>
-            <a:endParaRPr lang="en-GB" sz="2000"/>
+            <a:endParaRPr lang="en-GB" sz="2000" dirty="0"/>
           </a:p>
           <a:p>
             <a:r>
@@ -21992,36 +21954,87 @@
                 <a:ea typeface="+mn-lt"/>
                 <a:cs typeface="+mn-lt"/>
               </a:rPr>
-              <a:t>    Easy and manageable deployment of our web app on </a:t>
+              <a:t>    We used </a:t>
             </a:r>
             <a:r>
               <a:rPr lang="en-GB" sz="2000" dirty="0" err="1">
                 <a:ea typeface="+mn-lt"/>
                 <a:cs typeface="+mn-lt"/>
               </a:rPr>
-              <a:t>vultr</a:t>
+              <a:t>Vultr</a:t>
             </a:r>
             <a:r>
               <a:rPr lang="en-GB" sz="2000" dirty="0">
                 <a:ea typeface="+mn-lt"/>
                 <a:cs typeface="+mn-lt"/>
               </a:rPr>
-              <a:t> to provide an interactive demo with an </a:t>
-            </a:r>
-            <a:endParaRPr lang="en-GB" sz="2000"/>
-          </a:p>
-          <a:p>
+              <a:t> to handle the server </a:t>
+            </a:r>
             <a:r>
               <a:rPr lang="en-GB" sz="2000">
                 <a:ea typeface="+mn-lt"/>
                 <a:cs typeface="+mn-lt"/>
               </a:rPr>
-              <a:t>    infrastructure than does not bottleneck.</a:t>
-            </a:r>
-            <a:endParaRPr lang="en-GB" sz="2000"/>
-          </a:p>
-          <a:p>
-            <a:endParaRPr lang="en-GB" dirty="0"/>
+              <a:t>hosting to deploy </a:t>
+            </a:r>
+            <a:r>
+              <a:rPr lang="en-GB" sz="2000" dirty="0">
+                <a:ea typeface="+mn-lt"/>
+                <a:cs typeface="+mn-lt"/>
+              </a:rPr>
+              <a:t>the live demo </a:t>
+            </a:r>
+          </a:p>
+          <a:p>
+            <a:endParaRPr lang="en-GB" sz="2000" dirty="0">
+              <a:ea typeface="+mn-lt"/>
+              <a:cs typeface="+mn-lt"/>
+            </a:endParaRPr>
+          </a:p>
+          <a:p>
+            <a:endParaRPr lang="en-GB" sz="2000" dirty="0">
+              <a:ea typeface="+mn-lt"/>
+              <a:cs typeface="+mn-lt"/>
+            </a:endParaRPr>
+          </a:p>
+          <a:p>
+            <a:pPr marL="285750" indent="-285750">
+              <a:buFont typeface="Arial"/>
+              <a:buChar char="•"/>
+            </a:pPr>
+            <a:r>
+              <a:rPr lang="en-GB" sz="2000" dirty="0">
+                <a:ea typeface="+mn-lt"/>
+                <a:cs typeface="+mn-lt"/>
+              </a:rPr>
+              <a:t>DARK MODE! (just for bailey)</a:t>
+            </a:r>
+            <a:endParaRPr lang="en-GB" sz="2000" dirty="0"/>
+          </a:p>
+          <a:p>
+            <a:r>
+              <a:rPr lang="en-GB" sz="2000" dirty="0">
+                <a:ea typeface="+mn-lt"/>
+                <a:cs typeface="+mn-lt"/>
+              </a:rPr>
+              <a:t>    This improves the user’s experience as it helps reduce blue light production and eye strain or just</a:t>
+            </a:r>
+          </a:p>
+          <a:p>
+            <a:r>
+              <a:rPr lang="en-GB" sz="2000" dirty="0">
+                <a:ea typeface="+mn-lt"/>
+                <a:cs typeface="+mn-lt"/>
+              </a:rPr>
+              <a:t>    simply for preference. </a:t>
+            </a:r>
+            <a:endParaRPr lang="en-GB" sz="2000" dirty="0"/>
+          </a:p>
+          <a:p>
+            <a:endParaRPr lang="en-GB" sz="2000" dirty="0">
+              <a:ea typeface="+mn-lt"/>
+              <a:cs typeface="+mn-lt"/>
+            </a:endParaRPr>
           </a:p>
         </p:txBody>
       </p:sp>
@@ -22035,13 +22048,13 @@
   <p:clrMapOvr>
     <a:masterClrMapping/>
   </p:clrMapOvr>
-  <mc:AlternateContent xmlns:mc="http://schemas.openxmlformats.org/markup-compatibility/2006">
-    <mc:Choice xmlns:p14="http://schemas.microsoft.com/office/powerpoint/2010/main" Requires="p14">
+  <mc:AlternateContent xmlns:mc="http://schemas.openxmlformats.org/markup-compatibility/2006" xmlns:p14="http://schemas.microsoft.com/office/powerpoint/2010/main">
+    <mc:Choice Requires="p14">
       <p:transition spd="slow" p14:dur="1600">
         <p14:gallery dir="l"/>
       </p:transition>
     </mc:Choice>
-    <mc:Fallback>
+    <mc:Fallback xmlns="">
       <p:transition spd="slow">
         <p:fade/>
       </p:transition>
@@ -22223,13 +22236,13 @@
   <p:clrMapOvr>
     <a:masterClrMapping/>
   </p:clrMapOvr>
-  <mc:AlternateContent xmlns:mc="http://schemas.openxmlformats.org/markup-compatibility/2006">
-    <mc:Choice xmlns:p14="http://schemas.microsoft.com/office/powerpoint/2010/main" Requires="p14">
+  <mc:AlternateContent xmlns:mc="http://schemas.openxmlformats.org/markup-compatibility/2006" xmlns:p14="http://schemas.microsoft.com/office/powerpoint/2010/main">
+    <mc:Choice Requires="p14">
       <p:transition spd="slow" p14:dur="1600">
         <p14:gallery dir="l"/>
       </p:transition>
     </mc:Choice>
-    <mc:Fallback>
+    <mc:Fallback xmlns="">
       <p:transition spd="slow">
         <p:fade/>
       </p:transition>
